--- a/exports/pptx/lessons/middle-module-14-magic-squares/day-05-five-by-five.pptx
+++ b/exports/pptx/lessons/middle-module-14-magic-squares/day-05-five-by-five.pptx
@@ -18,9 +18,13 @@
     <p:sldId id="266" r:id="rId12"/>
     <p:sldId id="267" r:id="rId13"/>
     <p:sldId id="268" r:id="rId14"/>
+    <p:sldId id="269" r:id="rId15"/>
+    <p:sldId id="270" r:id="rId16"/>
+    <p:sldId id="271" r:id="rId17"/>
+    <p:sldId id="272" r:id="rId18"/>
   </p:sldIdLst>
   <p:notesMasterIdLst>
-    <p:notesMasterId r:id="rId15"/>
+    <p:notesMasterId r:id="rId19"/>
   </p:notesMasterIdLst>
   <p:sldSz cx="9144000" cy="5143500"/>
   <p:notesSz cx="5143500" cy="9144000"/>
@@ -890,6 +894,358 @@
             <a:fld id="{F7021451-1387-4CA6-816F-3879F97B5CBC}" type="slidenum">
               <a:rPr lang="en-US"/>
               <a:t>13</a:t>
+            </a:fld>
+            <a:endParaRPr lang="en-US"/>
+          </a:p>
+        </p:txBody>
+      </p:sp>
+    </p:spTree>
+    <p:extLst>
+      <p:ext uri="{BB962C8B-B14F-4D97-AF65-F5344CB8AC3E}">
+        <p14:creationId xmlns:p14="http://schemas.microsoft.com/office/powerpoint/2010/main" val="1024086991"/>
+      </p:ext>
+    </p:extLst>
+  </p:cSld>
+  <p:clrMapOvr>
+    <a:masterClrMapping/>
+  </p:clrMapOvr>
+</p:notes>
+</file>
+
+<file path=ppt/notesSlides/notesSlide14.xml><?xml version="1.0" encoding="utf-8"?>
+<p:notes xmlns:a="http://schemas.openxmlformats.org/drawingml/2006/main" xmlns:r="http://schemas.openxmlformats.org/officeDocument/2006/relationships" xmlns:p="http://schemas.openxmlformats.org/presentationml/2006/main">
+  <p:cSld>
+    <p:spTree>
+      <p:nvGrpSpPr>
+        <p:cNvPr id="1" name=""/>
+        <p:cNvGrpSpPr/>
+        <p:nvPr/>
+      </p:nvGrpSpPr>
+      <p:grpSpPr>
+        <a:xfrm>
+          <a:off x="0" y="0"/>
+          <a:ext cx="0" cy="0"/>
+          <a:chOff x="0" y="0"/>
+          <a:chExt cx="0" cy="0"/>
+        </a:xfrm>
+      </p:grpSpPr>
+      <p:sp>
+        <p:nvSpPr>
+          <p:cNvPr id="2" name="Slide Image Placeholder 1"/>
+          <p:cNvSpPr>
+            <a:spLocks noGrp="1" noRot="1" noChangeAspect="1"/>
+          </p:cNvSpPr>
+          <p:nvPr>
+            <p:ph type="sldImg"/>
+          </p:nvPr>
+        </p:nvSpPr>
+        <p:spPr/>
+      </p:sp>
+      <p:sp>
+        <p:nvSpPr>
+          <p:cNvPr id="3" name="Notes Placeholder 2"/>
+          <p:cNvSpPr>
+            <a:spLocks noGrp="1"/>
+          </p:cNvSpPr>
+          <p:nvPr>
+            <p:ph type="body" idx="1"/>
+          </p:nvPr>
+        </p:nvSpPr>
+        <p:spPr/>
+        <p:txBody>
+          <a:bodyPr/>
+          <a:lstStyle/>
+          <a:p>
+            <a:r>
+              <a:rPr lang="en-US" dirty="0"/>
+              <a:t/>
+            </a:r>
+            <a:endParaRPr lang="en-US" dirty="0"/>
+          </a:p>
+        </p:txBody>
+      </p:sp>
+      <p:sp>
+        <p:nvSpPr>
+          <p:cNvPr id="4" name="Slide Number Placeholder 3"/>
+          <p:cNvSpPr>
+            <a:spLocks noGrp="1"/>
+          </p:cNvSpPr>
+          <p:nvPr>
+            <p:ph type="sldNum" sz="quarter" idx="10"/>
+          </p:nvPr>
+        </p:nvSpPr>
+        <p:spPr/>
+        <p:txBody>
+          <a:bodyPr/>
+          <a:lstStyle/>
+          <a:p>
+            <a:fld id="{F7021451-1387-4CA6-816F-3879F97B5CBC}" type="slidenum">
+              <a:rPr lang="en-US"/>
+              <a:t>14</a:t>
+            </a:fld>
+            <a:endParaRPr lang="en-US"/>
+          </a:p>
+        </p:txBody>
+      </p:sp>
+    </p:spTree>
+    <p:extLst>
+      <p:ext uri="{BB962C8B-B14F-4D97-AF65-F5344CB8AC3E}">
+        <p14:creationId xmlns:p14="http://schemas.microsoft.com/office/powerpoint/2010/main" val="1024086991"/>
+      </p:ext>
+    </p:extLst>
+  </p:cSld>
+  <p:clrMapOvr>
+    <a:masterClrMapping/>
+  </p:clrMapOvr>
+</p:notes>
+</file>
+
+<file path=ppt/notesSlides/notesSlide15.xml><?xml version="1.0" encoding="utf-8"?>
+<p:notes xmlns:a="http://schemas.openxmlformats.org/drawingml/2006/main" xmlns:r="http://schemas.openxmlformats.org/officeDocument/2006/relationships" xmlns:p="http://schemas.openxmlformats.org/presentationml/2006/main">
+  <p:cSld>
+    <p:spTree>
+      <p:nvGrpSpPr>
+        <p:cNvPr id="1" name=""/>
+        <p:cNvGrpSpPr/>
+        <p:nvPr/>
+      </p:nvGrpSpPr>
+      <p:grpSpPr>
+        <a:xfrm>
+          <a:off x="0" y="0"/>
+          <a:ext cx="0" cy="0"/>
+          <a:chOff x="0" y="0"/>
+          <a:chExt cx="0" cy="0"/>
+        </a:xfrm>
+      </p:grpSpPr>
+      <p:sp>
+        <p:nvSpPr>
+          <p:cNvPr id="2" name="Slide Image Placeholder 1"/>
+          <p:cNvSpPr>
+            <a:spLocks noGrp="1" noRot="1" noChangeAspect="1"/>
+          </p:cNvSpPr>
+          <p:nvPr>
+            <p:ph type="sldImg"/>
+          </p:nvPr>
+        </p:nvSpPr>
+        <p:spPr/>
+      </p:sp>
+      <p:sp>
+        <p:nvSpPr>
+          <p:cNvPr id="3" name="Notes Placeholder 2"/>
+          <p:cNvSpPr>
+            <a:spLocks noGrp="1"/>
+          </p:cNvSpPr>
+          <p:nvPr>
+            <p:ph type="body" idx="1"/>
+          </p:nvPr>
+        </p:nvSpPr>
+        <p:spPr/>
+        <p:txBody>
+          <a:bodyPr/>
+          <a:lstStyle/>
+          <a:p>
+            <a:r>
+              <a:rPr lang="en-US" dirty="0"/>
+              <a:t/>
+            </a:r>
+            <a:endParaRPr lang="en-US" dirty="0"/>
+          </a:p>
+        </p:txBody>
+      </p:sp>
+      <p:sp>
+        <p:nvSpPr>
+          <p:cNvPr id="4" name="Slide Number Placeholder 3"/>
+          <p:cNvSpPr>
+            <a:spLocks noGrp="1"/>
+          </p:cNvSpPr>
+          <p:nvPr>
+            <p:ph type="sldNum" sz="quarter" idx="10"/>
+          </p:nvPr>
+        </p:nvSpPr>
+        <p:spPr/>
+        <p:txBody>
+          <a:bodyPr/>
+          <a:lstStyle/>
+          <a:p>
+            <a:fld id="{F7021451-1387-4CA6-816F-3879F97B5CBC}" type="slidenum">
+              <a:rPr lang="en-US"/>
+              <a:t>15</a:t>
+            </a:fld>
+            <a:endParaRPr lang="en-US"/>
+          </a:p>
+        </p:txBody>
+      </p:sp>
+    </p:spTree>
+    <p:extLst>
+      <p:ext uri="{BB962C8B-B14F-4D97-AF65-F5344CB8AC3E}">
+        <p14:creationId xmlns:p14="http://schemas.microsoft.com/office/powerpoint/2010/main" val="1024086991"/>
+      </p:ext>
+    </p:extLst>
+  </p:cSld>
+  <p:clrMapOvr>
+    <a:masterClrMapping/>
+  </p:clrMapOvr>
+</p:notes>
+</file>
+
+<file path=ppt/notesSlides/notesSlide16.xml><?xml version="1.0" encoding="utf-8"?>
+<p:notes xmlns:a="http://schemas.openxmlformats.org/drawingml/2006/main" xmlns:r="http://schemas.openxmlformats.org/officeDocument/2006/relationships" xmlns:p="http://schemas.openxmlformats.org/presentationml/2006/main">
+  <p:cSld>
+    <p:spTree>
+      <p:nvGrpSpPr>
+        <p:cNvPr id="1" name=""/>
+        <p:cNvGrpSpPr/>
+        <p:nvPr/>
+      </p:nvGrpSpPr>
+      <p:grpSpPr>
+        <a:xfrm>
+          <a:off x="0" y="0"/>
+          <a:ext cx="0" cy="0"/>
+          <a:chOff x="0" y="0"/>
+          <a:chExt cx="0" cy="0"/>
+        </a:xfrm>
+      </p:grpSpPr>
+      <p:sp>
+        <p:nvSpPr>
+          <p:cNvPr id="2" name="Slide Image Placeholder 1"/>
+          <p:cNvSpPr>
+            <a:spLocks noGrp="1" noRot="1" noChangeAspect="1"/>
+          </p:cNvSpPr>
+          <p:nvPr>
+            <p:ph type="sldImg"/>
+          </p:nvPr>
+        </p:nvSpPr>
+        <p:spPr/>
+      </p:sp>
+      <p:sp>
+        <p:nvSpPr>
+          <p:cNvPr id="3" name="Notes Placeholder 2"/>
+          <p:cNvSpPr>
+            <a:spLocks noGrp="1"/>
+          </p:cNvSpPr>
+          <p:nvPr>
+            <p:ph type="body" idx="1"/>
+          </p:nvPr>
+        </p:nvSpPr>
+        <p:spPr/>
+        <p:txBody>
+          <a:bodyPr/>
+          <a:lstStyle/>
+          <a:p>
+            <a:r>
+              <a:rPr lang="en-US" dirty="0"/>
+              <a:t/>
+            </a:r>
+            <a:endParaRPr lang="en-US" dirty="0"/>
+          </a:p>
+        </p:txBody>
+      </p:sp>
+      <p:sp>
+        <p:nvSpPr>
+          <p:cNvPr id="4" name="Slide Number Placeholder 3"/>
+          <p:cNvSpPr>
+            <a:spLocks noGrp="1"/>
+          </p:cNvSpPr>
+          <p:nvPr>
+            <p:ph type="sldNum" sz="quarter" idx="10"/>
+          </p:nvPr>
+        </p:nvSpPr>
+        <p:spPr/>
+        <p:txBody>
+          <a:bodyPr/>
+          <a:lstStyle/>
+          <a:p>
+            <a:fld id="{F7021451-1387-4CA6-816F-3879F97B5CBC}" type="slidenum">
+              <a:rPr lang="en-US"/>
+              <a:t>16</a:t>
+            </a:fld>
+            <a:endParaRPr lang="en-US"/>
+          </a:p>
+        </p:txBody>
+      </p:sp>
+    </p:spTree>
+    <p:extLst>
+      <p:ext uri="{BB962C8B-B14F-4D97-AF65-F5344CB8AC3E}">
+        <p14:creationId xmlns:p14="http://schemas.microsoft.com/office/powerpoint/2010/main" val="1024086991"/>
+      </p:ext>
+    </p:extLst>
+  </p:cSld>
+  <p:clrMapOvr>
+    <a:masterClrMapping/>
+  </p:clrMapOvr>
+</p:notes>
+</file>
+
+<file path=ppt/notesSlides/notesSlide17.xml><?xml version="1.0" encoding="utf-8"?>
+<p:notes xmlns:a="http://schemas.openxmlformats.org/drawingml/2006/main" xmlns:r="http://schemas.openxmlformats.org/officeDocument/2006/relationships" xmlns:p="http://schemas.openxmlformats.org/presentationml/2006/main">
+  <p:cSld>
+    <p:spTree>
+      <p:nvGrpSpPr>
+        <p:cNvPr id="1" name=""/>
+        <p:cNvGrpSpPr/>
+        <p:nvPr/>
+      </p:nvGrpSpPr>
+      <p:grpSpPr>
+        <a:xfrm>
+          <a:off x="0" y="0"/>
+          <a:ext cx="0" cy="0"/>
+          <a:chOff x="0" y="0"/>
+          <a:chExt cx="0" cy="0"/>
+        </a:xfrm>
+      </p:grpSpPr>
+      <p:sp>
+        <p:nvSpPr>
+          <p:cNvPr id="2" name="Slide Image Placeholder 1"/>
+          <p:cNvSpPr>
+            <a:spLocks noGrp="1" noRot="1" noChangeAspect="1"/>
+          </p:cNvSpPr>
+          <p:nvPr>
+            <p:ph type="sldImg"/>
+          </p:nvPr>
+        </p:nvSpPr>
+        <p:spPr/>
+      </p:sp>
+      <p:sp>
+        <p:nvSpPr>
+          <p:cNvPr id="3" name="Notes Placeholder 2"/>
+          <p:cNvSpPr>
+            <a:spLocks noGrp="1"/>
+          </p:cNvSpPr>
+          <p:nvPr>
+            <p:ph type="body" idx="1"/>
+          </p:nvPr>
+        </p:nvSpPr>
+        <p:spPr/>
+        <p:txBody>
+          <a:bodyPr/>
+          <a:lstStyle/>
+          <a:p>
+            <a:r>
+              <a:rPr lang="en-US" dirty="0"/>
+              <a:t/>
+            </a:r>
+            <a:endParaRPr lang="en-US" dirty="0"/>
+          </a:p>
+        </p:txBody>
+      </p:sp>
+      <p:sp>
+        <p:nvSpPr>
+          <p:cNvPr id="4" name="Slide Number Placeholder 3"/>
+          <p:cNvSpPr>
+            <a:spLocks noGrp="1"/>
+          </p:cNvSpPr>
+          <p:nvPr>
+            <p:ph type="sldNum" sz="quarter" idx="10"/>
+          </p:nvPr>
+        </p:nvSpPr>
+        <p:spPr/>
+        <p:txBody>
+          <a:bodyPr/>
+          <a:lstStyle/>
+          <a:p>
+            <a:fld id="{F7021451-1387-4CA6-816F-3879F97B5CBC}" type="slidenum">
+              <a:rPr lang="en-US"/>
+              <a:t>17</a:t>
             </a:fld>
             <a:endParaRPr lang="en-US"/>
           </a:p>
@@ -2235,148 +2591,6 @@
         </p:nvSpPr>
         <p:spPr>
           <a:xfrm>
-            <a:off x="406301" y="1223963"/>
-            <a:ext cx="8498026" cy="274290"/>
-          </a:xfrm>
-          <a:prstGeom prst="rect">
-            <a:avLst/>
-          </a:prstGeom>
-          <a:noFill/>
-          <a:ln/>
-        </p:spPr>
-        <p:txBody>
-          <a:bodyPr wrap="square" lIns="0" tIns="0" rIns="0" bIns="0" rtlCol="0" anchor="t"/>
-          <a:lstStyle/>
-          <a:p>
-            <a:pPr algn="l" indent="0" marL="0">
-              <a:lnSpc>
-                <a:spcPts val="2160"/>
-              </a:lnSpc>
-              <a:spcBef>
-                <a:spcPts val="600"/>
-              </a:spcBef>
-              <a:spcAft>
-                <a:spcPts val="800"/>
-              </a:spcAft>
-              <a:buNone/>
-            </a:pPr>
-            <a:r>
-              <a:rPr lang="en-US" sz="1800" b="1" dirty="0">
-                <a:solidFill>
-                  <a:srgbClr val="FE4447"/>
-                </a:solidFill>
-                <a:latin typeface="Georgia" pitchFamily="34" charset="0"/>
-                <a:ea typeface="Georgia" pitchFamily="34" charset="-122"/>
-                <a:cs typeface="Georgia" pitchFamily="34" charset="-120"/>
-              </a:rPr>
-              <a:t>Learning objective</a:t>
-            </a:r>
-            <a:endParaRPr lang="en-US" sz="1800" dirty="0"/>
-          </a:p>
-        </p:txBody>
-      </p:sp>
-      <p:sp>
-        <p:nvSpPr>
-          <p:cNvPr id="6" name="Text 4"/>
-          <p:cNvSpPr/>
-          <p:nvPr/>
-        </p:nvSpPr>
-        <p:spPr>
-          <a:xfrm>
-            <a:off x="406301" y="1637854"/>
-            <a:ext cx="8498026" cy="426541"/>
-          </a:xfrm>
-          <a:prstGeom prst="rect">
-            <a:avLst/>
-          </a:prstGeom>
-          <a:noFill/>
-          <a:ln/>
-        </p:spPr>
-        <p:txBody>
-          <a:bodyPr wrap="square" lIns="0" tIns="0" rIns="0" bIns="0" rtlCol="0" anchor="t"/>
-          <a:lstStyle/>
-          <a:p>
-            <a:pPr algn="l" indent="0" marL="0">
-              <a:lnSpc>
-                <a:spcPts val="1680"/>
-              </a:lnSpc>
-              <a:spcBef>
-                <a:spcPts val="300"/>
-              </a:spcBef>
-              <a:spcAft>
-                <a:spcPts val="300"/>
-              </a:spcAft>
-              <a:buNone/>
-            </a:pPr>
-            <a:r>
-              <a:rPr lang="en-US" sz="1200" dirty="0">
-                <a:solidFill>
-                  <a:srgbClr val="1C2833"/>
-                </a:solidFill>
-                <a:latin typeface="Arial" pitchFamily="34" charset="0"/>
-                <a:ea typeface="Arial" pitchFamily="34" charset="-122"/>
-                <a:cs typeface="Arial" pitchFamily="34" charset="-120"/>
-              </a:rPr>
-              <a:t>By the end of this lesson, students will independently construct a 5×5 magic square using the </a:t>
-            </a:r>
-            <a:pPr algn="l" indent="0" marL="0">
-              <a:lnSpc>
-                <a:spcPts val="1680"/>
-              </a:lnSpc>
-              <a:spcBef>
-                <a:spcPts val="300"/>
-              </a:spcBef>
-              <a:spcAft>
-                <a:spcPts val="300"/>
-              </a:spcAft>
-              <a:buNone/>
-            </a:pPr>
-            <a:r>
-              <a:rPr lang="en-US" sz="1200" i="1" dirty="0">
-                <a:solidFill>
-                  <a:srgbClr val="1C2833"/>
-                </a:solidFill>
-                <a:latin typeface="Arial" pitchFamily="34" charset="0"/>
-                <a:ea typeface="Arial" pitchFamily="34" charset="-122"/>
-                <a:cs typeface="Arial" pitchFamily="34" charset="-120"/>
-              </a:rPr>
-              <a:t>turagagati</a:t>
-            </a:r>
-            <a:pPr algn="l" indent="0" marL="0">
-              <a:lnSpc>
-                <a:spcPts val="1680"/>
-              </a:lnSpc>
-              <a:spcBef>
-                <a:spcPts val="300"/>
-              </a:spcBef>
-              <a:spcAft>
-                <a:spcPts val="300"/>
-              </a:spcAft>
-              <a:buNone/>
-            </a:pPr>
-            <a:r>
-              <a:rPr lang="en-US" sz="1200" dirty="0">
-                <a:solidFill>
-                  <a:srgbClr val="1C2833"/>
-                </a:solidFill>
-                <a:latin typeface="Arial" pitchFamily="34" charset="0"/>
-                <a:ea typeface="Arial" pitchFamily="34" charset="-122"/>
-                <a:cs typeface="Arial" pitchFamily="34" charset="-120"/>
-              </a:rPr>
-              <a:t> method and verify its magic constant of 65.</a:t>
-            </a:r>
-            <a:endParaRPr lang="en-US" sz="1200" dirty="0"/>
-          </a:p>
-        </p:txBody>
-      </p:sp>
-      <p:sp>
-        <p:nvSpPr>
-          <p:cNvPr id="7" name="Text 5"/>
-          <p:cNvSpPr/>
-          <p:nvPr/>
-        </p:nvSpPr>
-        <p:spPr>
-          <a:xfrm>
             <a:off x="406301" y="4434929"/>
             <a:ext cx="8498026" cy="213271"/>
           </a:xfrm>
@@ -2521,7 +2735,7 @@
                 <a:ea typeface="Georgia" pitchFamily="34" charset="-122"/>
                 <a:cs typeface="Georgia" pitchFamily="34" charset="-120"/>
               </a:rPr>
-              <a:t>Homework</a:t>
+              <a:t>Core (20 min) (cont.)</a:t>
             </a:r>
             <a:endParaRPr lang="en-US" sz="1800" dirty="0"/>
           </a:p>
@@ -2535,8 +2749,8 @@
         </p:nvSpPr>
         <p:spPr>
           <a:xfrm>
-            <a:off x="406301" y="870942"/>
-            <a:ext cx="8498026" cy="426541"/>
+            <a:off x="634901" y="883593"/>
+            <a:ext cx="8102798" cy="281880"/>
           </a:xfrm>
           <a:prstGeom prst="rect">
             <a:avLst/>
@@ -2548,13 +2762,31 @@
           <a:bodyPr wrap="square" lIns="0" tIns="0" rIns="0" bIns="0" rtlCol="0" anchor="t"/>
           <a:lstStyle/>
           <a:p>
-            <a:pPr algn="l" indent="0" marL="0">
-              <a:lnSpc>
-                <a:spcPts val="1680"/>
-              </a:lnSpc>
-              <a:spcBef>
-                <a:spcPts val="300"/>
-              </a:spcBef>
+            <a:pPr algn="l" marL="342900" indent="-342900">
+              <a:lnSpc>
+                <a:spcPts val="1620"/>
+              </a:lnSpc>
+              <a:spcAft>
+                <a:spcPts val="300"/>
+              </a:spcAft>
+              <a:buSzPct val="100000"/>
+              <a:buChar char="•"/>
+            </a:pPr>
+            <a:r>
+              <a:rPr lang="en-US" sz="1200" b="1" dirty="0">
+                <a:solidFill>
+                  <a:srgbClr val="1C2833"/>
+                </a:solidFill>
+                <a:latin typeface="Arial" pitchFamily="34" charset="0"/>
+                <a:ea typeface="Arial" pitchFamily="34" charset="-122"/>
+                <a:cs typeface="Arial" pitchFamily="34" charset="-120"/>
+              </a:rPr>
+              <a:t>Notice the structure.</a:t>
+            </a:r>
+            <a:pPr algn="l" indent="0" marL="0">
+              <a:lnSpc>
+                <a:spcPts val="1620"/>
+              </a:lnSpc>
               <a:spcAft>
                 <a:spcPts val="300"/>
               </a:spcAft>
@@ -2569,7 +2801,7 @@
                 <a:ea typeface="Arial" pitchFamily="34" charset="-122"/>
                 <a:cs typeface="Arial" pitchFamily="34" charset="-120"/>
               </a:rPr>
-              <a:t>– Construct a 7×7 magic square using the stair-step method. The magic constant should be 175. Yes, it takes time — work patiently. Bring it tomorrow for spot-checks.</a:t>
+              <a:t> Take 3 minutes to observe:</a:t>
             </a:r>
             <a:endParaRPr lang="en-US" sz="1200" dirty="0"/>
           </a:p>
@@ -2578,6 +2810,140 @@
       <p:sp>
         <p:nvSpPr>
           <p:cNvPr id="5" name="Text 3"/>
+          <p:cNvSpPr/>
+          <p:nvPr/>
+        </p:nvSpPr>
+        <p:spPr>
+          <a:xfrm>
+            <a:off x="634901" y="1266974"/>
+            <a:ext cx="8102798" cy="769441"/>
+          </a:xfrm>
+          <a:prstGeom prst="rect">
+            <a:avLst/>
+          </a:prstGeom>
+          <a:noFill/>
+          <a:ln/>
+        </p:spPr>
+        <p:txBody>
+          <a:bodyPr wrap="square" lIns="0" tIns="0" rIns="0" bIns="0" rtlCol="0" anchor="t"/>
+          <a:lstStyle/>
+          <a:p>
+            <a:pPr algn="l" marL="342900" indent="-342900">
+              <a:lnSpc>
+                <a:spcPts val="1620"/>
+              </a:lnSpc>
+              <a:spcAft>
+                <a:spcPts val="300"/>
+              </a:spcAft>
+              <a:buSzPct val="100000"/>
+              <a:buChar char="•"/>
+            </a:pPr>
+            <a:r>
+              <a:rPr lang="en-US" sz="1200" dirty="0">
+                <a:solidFill>
+                  <a:srgbClr val="1C2833"/>
+                </a:solidFill>
+                <a:latin typeface="Arial" pitchFamily="34" charset="0"/>
+                <a:ea typeface="Arial" pitchFamily="34" charset="-122"/>
+                <a:cs typeface="Arial" pitchFamily="34" charset="-120"/>
+              </a:rPr>
+              <a:t>13 (the middle number) is in the centre — consistent with the </a:t>
+            </a:r>
+            <a:pPr algn="l" indent="0" marL="0">
+              <a:lnSpc>
+                <a:spcPts val="1620"/>
+              </a:lnSpc>
+              <a:spcAft>
+                <a:spcPts val="300"/>
+              </a:spcAft>
+              <a:buNone/>
+            </a:pPr>
+            <a:r>
+              <a:rPr lang="en-US" sz="1200" i="1" dirty="0">
+                <a:solidFill>
+                  <a:srgbClr val="1C2833"/>
+                </a:solidFill>
+                <a:latin typeface="Arial" pitchFamily="34" charset="0"/>
+                <a:ea typeface="Arial" pitchFamily="34" charset="-122"/>
+                <a:cs typeface="Arial" pitchFamily="34" charset="-120"/>
+              </a:rPr>
+              <a:t>n</a:t>
+            </a:r>
+            <a:pPr algn="l" indent="0" marL="0">
+              <a:lnSpc>
+                <a:spcPts val="1620"/>
+              </a:lnSpc>
+              <a:spcAft>
+                <a:spcPts val="300"/>
+              </a:spcAft>
+              <a:buNone/>
+            </a:pPr>
+            <a:r>
+              <a:rPr lang="en-US" sz="1200" dirty="0">
+                <a:solidFill>
+                  <a:srgbClr val="1C2833"/>
+                </a:solidFill>
+                <a:latin typeface="Arial" pitchFamily="34" charset="0"/>
+                <a:ea typeface="Arial" pitchFamily="34" charset="-122"/>
+                <a:cs typeface="Arial" pitchFamily="34" charset="-120"/>
+              </a:rPr>
+              <a:t>²/2 + 1 = 13 rule for odd-order.</a:t>
+            </a:r>
+            <a:endParaRPr lang="en-US" sz="1200" dirty="0"/>
+          </a:p>
+          <a:p>
+            <a:pPr algn="l" marL="342900" indent="-342900">
+              <a:lnSpc>
+                <a:spcPts val="1620"/>
+              </a:lnSpc>
+              <a:spcAft>
+                <a:spcPts val="300"/>
+              </a:spcAft>
+              <a:buSzPct val="100000"/>
+              <a:buChar char="•"/>
+            </a:pPr>
+            <a:r>
+              <a:rPr lang="en-US" sz="1200" dirty="0">
+                <a:solidFill>
+                  <a:srgbClr val="1C2833"/>
+                </a:solidFill>
+                <a:latin typeface="Arial" pitchFamily="34" charset="0"/>
+                <a:ea typeface="Arial" pitchFamily="34" charset="-122"/>
+                <a:cs typeface="Arial" pitchFamily="34" charset="-120"/>
+              </a:rPr>
+              <a:t>Numbers 1–9 occupy a "broken diagonal" pattern; 16–25 occupy the complementary pattern.</a:t>
+            </a:r>
+            <a:endParaRPr lang="en-US" sz="1200" dirty="0"/>
+          </a:p>
+          <a:p>
+            <a:pPr algn="l" marL="342900" indent="-342900">
+              <a:lnSpc>
+                <a:spcPts val="1620"/>
+              </a:lnSpc>
+              <a:spcAft>
+                <a:spcPts val="300"/>
+              </a:spcAft>
+              <a:buSzPct val="100000"/>
+              <a:buChar char="•"/>
+            </a:pPr>
+            <a:r>
+              <a:rPr lang="en-US" sz="1200" dirty="0">
+                <a:solidFill>
+                  <a:srgbClr val="1C2833"/>
+                </a:solidFill>
+                <a:latin typeface="Arial" pitchFamily="34" charset="0"/>
+                <a:ea typeface="Arial" pitchFamily="34" charset="-122"/>
+                <a:cs typeface="Arial" pitchFamily="34" charset="-120"/>
+              </a:rPr>
+              <a:t>The same algorithm that gave us the 3×3 gave us this. The rule does not change with size.</a:t>
+            </a:r>
+            <a:endParaRPr lang="en-US" sz="1200" dirty="0"/>
+          </a:p>
+        </p:txBody>
+      </p:sp>
+      <p:sp>
+        <p:nvSpPr>
+          <p:cNvPr id="6" name="Text 4"/>
           <p:cNvSpPr/>
           <p:nvPr/>
         </p:nvSpPr>
@@ -2727,7 +3093,7 @@
                 <a:ea typeface="Georgia" pitchFamily="34" charset="-122"/>
                 <a:cs typeface="Georgia" pitchFamily="34" charset="-120"/>
               </a:rPr>
-              <a:t>Differentiation</a:t>
+              <a:t>Activity (15 min) — Formative quiz Part B + speed construction</a:t>
             </a:r>
             <a:endParaRPr lang="en-US" sz="1800" dirty="0"/>
           </a:p>
@@ -2742,7 +3108,7 @@
         <p:spPr>
           <a:xfrm>
             <a:off x="634901" y="883593"/>
-            <a:ext cx="8102798" cy="525661"/>
+            <a:ext cx="8102798" cy="750391"/>
           </a:xfrm>
           <a:prstGeom prst="rect">
             <a:avLst/>
@@ -2773,7 +3139,7 @@
                 <a:ea typeface="Arial" pitchFamily="34" charset="-122"/>
                 <a:cs typeface="Arial" pitchFamily="34" charset="-120"/>
               </a:rPr>
-              <a:t>One tier up:</a:t>
+              <a:t>First 10 min:</a:t>
             </a:r>
             <a:pPr algn="l" indent="0" marL="0">
               <a:lnSpc>
@@ -2793,7 +3159,47 @@
                 <a:ea typeface="Arial" pitchFamily="34" charset="-122"/>
                 <a:cs typeface="Arial" pitchFamily="34" charset="-120"/>
               </a:rPr>
-              <a:t> Construct a 9×9 magic square. Constant = 369. Time it.</a:t>
+              <a:t> Hand out </a:t>
+            </a:r>
+            <a:pPr algn="l" indent="0" marL="0">
+              <a:lnSpc>
+                <a:spcPts val="1620"/>
+              </a:lnSpc>
+              <a:spcAft>
+                <a:spcPts val="300"/>
+              </a:spcAft>
+              <a:buNone/>
+            </a:pPr>
+            <a:r>
+              <a:rPr lang="en-US" sz="1200" dirty="0">
+                <a:solidFill>
+                  <a:srgbClr val="1C2833"/>
+                </a:solidFill>
+                <a:latin typeface="Arial" pitchFamily="34" charset="0"/>
+                <a:ea typeface="Arial" pitchFamily="34" charset="-122"/>
+                <a:cs typeface="Arial" pitchFamily="34" charset="-120"/>
+              </a:rPr>
+              <a:t>quizzes/formative.md</a:t>
+            </a:r>
+            <a:pPr algn="l" indent="0" marL="0">
+              <a:lnSpc>
+                <a:spcPts val="1620"/>
+              </a:lnSpc>
+              <a:spcAft>
+                <a:spcPts val="300"/>
+              </a:spcAft>
+              <a:buNone/>
+            </a:pPr>
+            <a:r>
+              <a:rPr lang="en-US" sz="1200" dirty="0">
+                <a:solidFill>
+                  <a:srgbClr val="1C2833"/>
+                </a:solidFill>
+                <a:latin typeface="Arial" pitchFamily="34" charset="0"/>
+                <a:ea typeface="Arial" pitchFamily="34" charset="-122"/>
+                <a:cs typeface="Arial" pitchFamily="34" charset="-120"/>
+              </a:rPr>
+              <a:t> Part B. Students complete individually.</a:t>
             </a:r>
             <a:endParaRPr lang="en-US" sz="1200" dirty="0"/>
           </a:p>
@@ -2817,7 +3223,7 @@
                 <a:ea typeface="Arial" pitchFamily="34" charset="-122"/>
                 <a:cs typeface="Arial" pitchFamily="34" charset="-120"/>
               </a:rPr>
-              <a:t>One tier down:</a:t>
+              <a:t>Last 5 min:</a:t>
             </a:r>
             <a:pPr algn="l" indent="0" marL="0">
               <a:lnSpc>
@@ -2837,7 +3243,7 @@
                 <a:ea typeface="Arial" pitchFamily="34" charset="-122"/>
                 <a:cs typeface="Arial" pitchFamily="34" charset="-120"/>
               </a:rPr>
-              <a:t> Construct another 5×5, slowly, with the rule sheet visible. Speed is not the goal yet.</a:t>
+              <a:t> Each student starts a fresh 5×5 grid. On "Go," they construct a magic square from scratch as fast as they can. Self-time. Verify one row before stopping the watch.</a:t>
             </a:r>
             <a:endParaRPr lang="en-US" sz="1200" dirty="0"/>
           </a:p>
@@ -2995,7 +3401,7 @@
                 <a:ea typeface="Georgia" pitchFamily="34" charset="-122"/>
                 <a:cs typeface="Georgia" pitchFamily="34" charset="-120"/>
               </a:rPr>
-              <a:t>Teacher notes</a:t>
+              <a:t>Wrap-up (5 min)</a:t>
             </a:r>
             <a:endParaRPr lang="en-US" sz="1800" dirty="0"/>
           </a:p>
@@ -3009,8 +3415,8 @@
         </p:nvSpPr>
         <p:spPr>
           <a:xfrm>
-            <a:off x="406301" y="870942"/>
-            <a:ext cx="8498026" cy="1066354"/>
+            <a:off x="634901" y="883593"/>
+            <a:ext cx="8102798" cy="769441"/>
           </a:xfrm>
           <a:prstGeom prst="rect">
             <a:avLst/>
@@ -3022,17 +3428,15 @@
           <a:bodyPr wrap="square" lIns="0" tIns="0" rIns="0" bIns="0" rtlCol="0" anchor="t"/>
           <a:lstStyle/>
           <a:p>
-            <a:pPr algn="l" indent="0" marL="0">
-              <a:lnSpc>
-                <a:spcPts val="1680"/>
-              </a:lnSpc>
-              <a:spcBef>
-                <a:spcPts val="300"/>
-              </a:spcBef>
-              <a:spcAft>
-                <a:spcPts val="300"/>
-              </a:spcAft>
-              <a:buNone/>
+            <a:pPr algn="l" marL="342900" indent="-342900">
+              <a:lnSpc>
+                <a:spcPts val="1620"/>
+              </a:lnSpc>
+              <a:spcAft>
+                <a:spcPts val="300"/>
+              </a:spcAft>
+              <a:buSzPct val="100000"/>
+              <a:buChar char="•"/>
             </a:pPr>
             <a:r>
               <a:rPr lang="en-US" sz="1200" dirty="0">
@@ -3043,19 +3447,20 @@
                 <a:ea typeface="Arial" pitchFamily="34" charset="-122"/>
                 <a:cs typeface="Arial" pitchFamily="34" charset="-120"/>
               </a:rPr>
-              <a:t>– For the live demonstration, use a slow pace and check student-following frequently — "where would 2 go?" "is that cell filled?" – Students may resist because "I already built one at home." Push them to </a:t>
-            </a:r>
-            <a:pPr algn="l" indent="0" marL="0">
-              <a:lnSpc>
-                <a:spcPts val="1680"/>
-              </a:lnSpc>
-              <a:spcBef>
-                <a:spcPts val="300"/>
-              </a:spcBef>
-              <a:spcAft>
-                <a:spcPts val="300"/>
-              </a:spcAft>
-              <a:buNone/>
+              <a:t>Show of hands: who finished in under 4 minutes? Under 6? Under 8?</a:t>
+            </a:r>
+            <a:endParaRPr lang="en-US" sz="1200" dirty="0"/>
+          </a:p>
+          <a:p>
+            <a:pPr algn="l" marL="342900" indent="-342900">
+              <a:lnSpc>
+                <a:spcPts val="1620"/>
+              </a:lnSpc>
+              <a:spcAft>
+                <a:spcPts val="300"/>
+              </a:spcAft>
+              <a:buSzPct val="100000"/>
+              <a:buChar char="•"/>
             </a:pPr>
             <a:r>
               <a:rPr lang="en-US" sz="1200" i="1" dirty="0">
@@ -3066,19 +3471,20 @@
                 <a:ea typeface="Arial" pitchFamily="34" charset="-122"/>
                 <a:cs typeface="Arial" pitchFamily="34" charset="-120"/>
               </a:rPr>
-              <a:t>re-build</a:t>
-            </a:r>
-            <a:pPr algn="l" indent="0" marL="0">
-              <a:lnSpc>
-                <a:spcPts val="1680"/>
-              </a:lnSpc>
-              <a:spcBef>
-                <a:spcPts val="300"/>
-              </a:spcBef>
-              <a:spcAft>
-                <a:spcPts val="300"/>
-              </a:spcAft>
-              <a:buNone/>
+              <a:t>"Yesterday's home practice was the same 5×5. Tomorrow we look at a different beast — the 4×4."</a:t>
+            </a:r>
+            <a:endParaRPr lang="en-US" sz="1200" dirty="0"/>
+          </a:p>
+          <a:p>
+            <a:pPr algn="l" marL="342900" indent="-342900">
+              <a:lnSpc>
+                <a:spcPts val="1620"/>
+              </a:lnSpc>
+              <a:spcAft>
+                <a:spcPts val="300"/>
+              </a:spcAft>
+              <a:buSzPct val="100000"/>
+              <a:buChar char="•"/>
             </a:pPr>
             <a:r>
               <a:rPr lang="en-US" sz="1200" dirty="0">
@@ -3089,7 +3495,7 @@
                 <a:ea typeface="Arial" pitchFamily="34" charset="-122"/>
                 <a:cs typeface="Arial" pitchFamily="34" charset="-120"/>
               </a:rPr>
-              <a:t> it on the board — narrating the rule reinforces it. – A few students will produce mirror-image squares because they reversed the up-right direction. Show that mirror images are also valid magic squares (by symmetry from Day 3) — but consistency matters when you're describing the algorithm.</a:t>
+              <a:t>Preview Day 6: Khajuraho and the 4×4.</a:t>
             </a:r>
             <a:endParaRPr lang="en-US" sz="1200" dirty="0"/>
           </a:p>
@@ -3247,6 +3653,1403 @@
                 <a:ea typeface="Georgia" pitchFamily="34" charset="-122"/>
                 <a:cs typeface="Georgia" pitchFamily="34" charset="-120"/>
               </a:rPr>
+              <a:t>Student-facing content</a:t>
+            </a:r>
+            <a:endParaRPr lang="en-US" sz="1800" dirty="0"/>
+          </a:p>
+        </p:txBody>
+      </p:sp>
+      <p:sp>
+        <p:nvSpPr>
+          <p:cNvPr id="4" name="Text 2"/>
+          <p:cNvSpPr/>
+          <p:nvPr/>
+        </p:nvSpPr>
+        <p:spPr>
+          <a:xfrm>
+            <a:off x="406301" y="883593"/>
+            <a:ext cx="8331398" cy="2169319"/>
+          </a:xfrm>
+          <a:prstGeom prst="rect">
+            <a:avLst/>
+          </a:prstGeom>
+          <a:solidFill>
+            <a:srgbClr val="F4F8F9"/>
+          </a:solidFill>
+          <a:ln/>
+        </p:spPr>
+        <p:txBody>
+          <a:bodyPr wrap="square" rtlCol="0" anchor="ctr"/>
+          <a:lstStyle/>
+          <a:p>
+            <a:pPr indent="0" marL="0">
+              <a:buNone/>
+            </a:pPr>
+            <a:endParaRPr lang="en-US" dirty="0"/>
+          </a:p>
+        </p:txBody>
+      </p:sp>
+      <p:sp>
+        <p:nvSpPr>
+          <p:cNvPr id="5" name="Shape 3"/>
+          <p:cNvSpPr/>
+          <p:nvPr/>
+        </p:nvSpPr>
+        <p:spPr>
+          <a:xfrm>
+            <a:off x="434876" y="883593"/>
+            <a:ext cx="0" cy="2169319"/>
+          </a:xfrm>
+          <a:prstGeom prst="line">
+            <a:avLst/>
+          </a:prstGeom>
+          <a:noFill/>
+          <a:ln w="57150">
+            <a:solidFill>
+              <a:srgbClr val="FE4447"/>
+            </a:solidFill>
+            <a:prstDash val="solid"/>
+          </a:ln>
+        </p:spPr>
+      </p:sp>
+      <p:sp>
+        <p:nvSpPr>
+          <p:cNvPr id="6" name="Text 4"/>
+          <p:cNvSpPr/>
+          <p:nvPr/>
+        </p:nvSpPr>
+        <p:spPr>
+          <a:xfrm>
+            <a:off x="692051" y="1074093"/>
+            <a:ext cx="7973389" cy="230981"/>
+          </a:xfrm>
+          <a:prstGeom prst="rect">
+            <a:avLst/>
+          </a:prstGeom>
+          <a:noFill/>
+          <a:ln/>
+        </p:spPr>
+        <p:txBody>
+          <a:bodyPr wrap="square" lIns="0" tIns="0" rIns="0" bIns="0" rtlCol="0" anchor="t"/>
+          <a:lstStyle/>
+          <a:p>
+            <a:pPr algn="l" indent="0" marL="0">
+              <a:lnSpc>
+                <a:spcPts val="1820"/>
+              </a:lnSpc>
+              <a:spcBef>
+                <a:spcPts val="300"/>
+              </a:spcBef>
+              <a:spcAft>
+                <a:spcPts val="300"/>
+              </a:spcAft>
+              <a:buNone/>
+            </a:pPr>
+            <a:r>
+              <a:rPr lang="en-US" sz="1300" b="1" i="1" dirty="0">
+                <a:solidFill>
+                  <a:srgbClr val="1C2833"/>
+                </a:solidFill>
+                <a:latin typeface="Georgia" pitchFamily="34" charset="0"/>
+                <a:ea typeface="Georgia" pitchFamily="34" charset="-122"/>
+                <a:cs typeface="Georgia" pitchFamily="34" charset="-120"/>
+              </a:rPr>
+              <a:t>The 5×5 magic square — classical Nārāyaṇa form</a:t>
+            </a:r>
+            <a:endParaRPr lang="en-US" sz="1300" dirty="0"/>
+          </a:p>
+        </p:txBody>
+      </p:sp>
+      <p:sp>
+        <p:nvSpPr>
+          <p:cNvPr id="7" name="Text 5"/>
+          <p:cNvSpPr/>
+          <p:nvPr/>
+        </p:nvSpPr>
+        <p:spPr>
+          <a:xfrm>
+            <a:off x="692051" y="1343174"/>
+            <a:ext cx="7973389" cy="230981"/>
+          </a:xfrm>
+          <a:prstGeom prst="rect">
+            <a:avLst/>
+          </a:prstGeom>
+          <a:noFill/>
+          <a:ln/>
+        </p:spPr>
+        <p:txBody>
+          <a:bodyPr wrap="square" lIns="0" tIns="0" rIns="0" bIns="0" rtlCol="0" anchor="t"/>
+          <a:lstStyle/>
+          <a:p>
+            <a:pPr algn="l" indent="0" marL="0">
+              <a:lnSpc>
+                <a:spcPts val="1820"/>
+              </a:lnSpc>
+              <a:spcBef>
+                <a:spcPts val="300"/>
+              </a:spcBef>
+              <a:spcAft>
+                <a:spcPts val="300"/>
+              </a:spcAft>
+              <a:buNone/>
+            </a:pPr>
+            <a:r>
+              <a:rPr lang="en-US" sz="1300" dirty="0">
+                <a:solidFill>
+                  <a:srgbClr val="1C2833"/>
+                </a:solidFill>
+                <a:latin typeface="Georgia" pitchFamily="34" charset="0"/>
+                <a:ea typeface="Georgia" pitchFamily="34" charset="-122"/>
+                <a:cs typeface="Georgia" pitchFamily="34" charset="-120"/>
+              </a:rPr>
+              <a:t>Magic constant: 65 (from </a:t>
+            </a:r>
+            <a:pPr algn="l" indent="0" marL="0">
+              <a:lnSpc>
+                <a:spcPts val="1820"/>
+              </a:lnSpc>
+              <a:spcBef>
+                <a:spcPts val="300"/>
+              </a:spcBef>
+              <a:spcAft>
+                <a:spcPts val="300"/>
+              </a:spcAft>
+              <a:buNone/>
+            </a:pPr>
+            <a:r>
+              <a:rPr lang="en-US" sz="1300" i="1" dirty="0">
+                <a:solidFill>
+                  <a:srgbClr val="1C2833"/>
+                </a:solidFill>
+                <a:latin typeface="Georgia" pitchFamily="34" charset="0"/>
+                <a:ea typeface="Georgia" pitchFamily="34" charset="-122"/>
+                <a:cs typeface="Georgia" pitchFamily="34" charset="-120"/>
+              </a:rPr>
+              <a:t>S = n(n² + 1)/2</a:t>
+            </a:r>
+            <a:pPr algn="l" indent="0" marL="0">
+              <a:lnSpc>
+                <a:spcPts val="1820"/>
+              </a:lnSpc>
+              <a:spcBef>
+                <a:spcPts val="300"/>
+              </a:spcBef>
+              <a:spcAft>
+                <a:spcPts val="300"/>
+              </a:spcAft>
+              <a:buNone/>
+            </a:pPr>
+            <a:r>
+              <a:rPr lang="en-US" sz="1300" dirty="0">
+                <a:solidFill>
+                  <a:srgbClr val="1C2833"/>
+                </a:solidFill>
+                <a:latin typeface="Georgia" pitchFamily="34" charset="0"/>
+                <a:ea typeface="Georgia" pitchFamily="34" charset="-122"/>
+                <a:cs typeface="Georgia" pitchFamily="34" charset="-120"/>
+              </a:rPr>
+              <a:t> with </a:t>
+            </a:r>
+            <a:pPr algn="l" indent="0" marL="0">
+              <a:lnSpc>
+                <a:spcPts val="1820"/>
+              </a:lnSpc>
+              <a:spcBef>
+                <a:spcPts val="300"/>
+              </a:spcBef>
+              <a:spcAft>
+                <a:spcPts val="300"/>
+              </a:spcAft>
+              <a:buNone/>
+            </a:pPr>
+            <a:r>
+              <a:rPr lang="en-US" sz="1300" i="1" dirty="0">
+                <a:solidFill>
+                  <a:srgbClr val="1C2833"/>
+                </a:solidFill>
+                <a:latin typeface="Georgia" pitchFamily="34" charset="0"/>
+                <a:ea typeface="Georgia" pitchFamily="34" charset="-122"/>
+                <a:cs typeface="Georgia" pitchFamily="34" charset="-120"/>
+              </a:rPr>
+              <a:t>n</a:t>
+            </a:r>
+            <a:pPr algn="l" indent="0" marL="0">
+              <a:lnSpc>
+                <a:spcPts val="1820"/>
+              </a:lnSpc>
+              <a:spcBef>
+                <a:spcPts val="300"/>
+              </a:spcBef>
+              <a:spcAft>
+                <a:spcPts val="300"/>
+              </a:spcAft>
+              <a:buNone/>
+            </a:pPr>
+            <a:r>
+              <a:rPr lang="en-US" sz="1300" dirty="0">
+                <a:solidFill>
+                  <a:srgbClr val="1C2833"/>
+                </a:solidFill>
+                <a:latin typeface="Georgia" pitchFamily="34" charset="0"/>
+                <a:ea typeface="Georgia" pitchFamily="34" charset="-122"/>
+                <a:cs typeface="Georgia" pitchFamily="34" charset="-120"/>
+              </a:rPr>
+              <a:t> = 5).</a:t>
+            </a:r>
+            <a:endParaRPr lang="en-US" sz="1300" dirty="0"/>
+          </a:p>
+        </p:txBody>
+      </p:sp>
+      <p:sp>
+        <p:nvSpPr>
+          <p:cNvPr id="8" name="Text 6"/>
+          <p:cNvSpPr/>
+          <p:nvPr/>
+        </p:nvSpPr>
+        <p:spPr>
+          <a:xfrm>
+            <a:off x="692051" y="1612255"/>
+            <a:ext cx="7973389" cy="750094"/>
+          </a:xfrm>
+          <a:prstGeom prst="rect">
+            <a:avLst/>
+          </a:prstGeom>
+          <a:noFill/>
+          <a:ln/>
+        </p:spPr>
+        <p:txBody>
+          <a:bodyPr wrap="square" lIns="0" tIns="0" rIns="0" bIns="0" rtlCol="0" anchor="t"/>
+          <a:lstStyle/>
+          <a:p>
+            <a:pPr algn="l" indent="0" marL="0">
+              <a:lnSpc>
+                <a:spcPts val="1820"/>
+              </a:lnSpc>
+              <a:spcBef>
+                <a:spcPts val="300"/>
+              </a:spcBef>
+              <a:spcAft>
+                <a:spcPts val="300"/>
+              </a:spcAft>
+              <a:buNone/>
+            </a:pPr>
+            <a:r>
+              <a:rPr lang="en-US" sz="1300" dirty="0">
+                <a:solidFill>
+                  <a:srgbClr val="1C2833"/>
+                </a:solidFill>
+                <a:latin typeface="Georgia" pitchFamily="34" charset="0"/>
+                <a:ea typeface="Georgia" pitchFamily="34" charset="-122"/>
+                <a:cs typeface="Georgia" pitchFamily="34" charset="-120"/>
+              </a:rPr>
+              <a:t>``</a:t>
+            </a:r>
+            <a:pPr algn="l" indent="0" marL="0">
+              <a:lnSpc>
+                <a:spcPts val="1820"/>
+              </a:lnSpc>
+              <a:spcBef>
+                <a:spcPts val="300"/>
+              </a:spcBef>
+              <a:spcAft>
+                <a:spcPts val="300"/>
+              </a:spcAft>
+              <a:buNone/>
+            </a:pPr>
+            <a:r>
+              <a:rPr lang="en-US" sz="1300" i="1" dirty="0">
+                <a:solidFill>
+                  <a:srgbClr val="1C2833"/>
+                </a:solidFill>
+                <a:latin typeface="Georgia" pitchFamily="34" charset="0"/>
+                <a:ea typeface="Georgia" pitchFamily="34" charset="-122"/>
+                <a:cs typeface="Georgia" pitchFamily="34" charset="-120"/>
+              </a:rPr>
+              <a:t> 17 | 24 | 1 | 8 | 15 ---------------------- 23 | 5 | 7 | 14 | 16 ---------------------- 4 | 6 | 13 | 20 | 22 ---------------------- 10 | 12 | 19 | 21 | 3 ---------------------- 11 | 18 | 25 | 2 | 9</a:t>
+            </a:r>
+            <a:pPr algn="l" indent="0" marL="0">
+              <a:lnSpc>
+                <a:spcPts val="1820"/>
+              </a:lnSpc>
+              <a:spcBef>
+                <a:spcPts val="300"/>
+              </a:spcBef>
+              <a:spcAft>
+                <a:spcPts val="300"/>
+              </a:spcAft>
+              <a:buNone/>
+            </a:pPr>
+            <a:r>
+              <a:rPr lang="en-US" sz="1300" dirty="0">
+                <a:solidFill>
+                  <a:srgbClr val="1C2833"/>
+                </a:solidFill>
+                <a:latin typeface="Georgia" pitchFamily="34" charset="0"/>
+                <a:ea typeface="Georgia" pitchFamily="34" charset="-122"/>
+                <a:cs typeface="Georgia" pitchFamily="34" charset="-120"/>
+              </a:rPr>
+              <a:t>``</a:t>
+            </a:r>
+            <a:endParaRPr lang="en-US" sz="1300" dirty="0"/>
+          </a:p>
+        </p:txBody>
+      </p:sp>
+      <p:sp>
+        <p:nvSpPr>
+          <p:cNvPr id="9" name="Text 7"/>
+          <p:cNvSpPr/>
+          <p:nvPr/>
+        </p:nvSpPr>
+        <p:spPr>
+          <a:xfrm>
+            <a:off x="692051" y="2400449"/>
+            <a:ext cx="7973389" cy="461963"/>
+          </a:xfrm>
+          <a:prstGeom prst="rect">
+            <a:avLst/>
+          </a:prstGeom>
+          <a:noFill/>
+          <a:ln/>
+        </p:spPr>
+        <p:txBody>
+          <a:bodyPr wrap="square" lIns="0" tIns="0" rIns="0" bIns="0" rtlCol="0" anchor="t"/>
+          <a:lstStyle/>
+          <a:p>
+            <a:pPr algn="l" indent="0" marL="0">
+              <a:lnSpc>
+                <a:spcPts val="1820"/>
+              </a:lnSpc>
+              <a:spcBef>
+                <a:spcPts val="300"/>
+              </a:spcBef>
+              <a:spcAft>
+                <a:spcPts val="300"/>
+              </a:spcAft>
+              <a:buNone/>
+            </a:pPr>
+            <a:r>
+              <a:rPr lang="en-US" sz="1300" dirty="0">
+                <a:solidFill>
+                  <a:srgbClr val="1C2833"/>
+                </a:solidFill>
+                <a:latin typeface="Georgia" pitchFamily="34" charset="0"/>
+                <a:ea typeface="Georgia" pitchFamily="34" charset="-122"/>
+                <a:cs typeface="Georgia" pitchFamily="34" charset="-120"/>
+              </a:rPr>
+              <a:t>Built using the </a:t>
+            </a:r>
+            <a:pPr algn="l" indent="0" marL="0">
+              <a:lnSpc>
+                <a:spcPts val="1820"/>
+              </a:lnSpc>
+              <a:spcBef>
+                <a:spcPts val="300"/>
+              </a:spcBef>
+              <a:spcAft>
+                <a:spcPts val="300"/>
+              </a:spcAft>
+              <a:buNone/>
+            </a:pPr>
+            <a:r>
+              <a:rPr lang="en-US" sz="1300" i="1" dirty="0">
+                <a:solidFill>
+                  <a:srgbClr val="1C2833"/>
+                </a:solidFill>
+                <a:latin typeface="Georgia" pitchFamily="34" charset="0"/>
+                <a:ea typeface="Georgia" pitchFamily="34" charset="-122"/>
+                <a:cs typeface="Georgia" pitchFamily="34" charset="-120"/>
+              </a:rPr>
+              <a:t>turagagati</a:t>
+            </a:r>
+            <a:pPr algn="l" indent="0" marL="0">
+              <a:lnSpc>
+                <a:spcPts val="1820"/>
+              </a:lnSpc>
+              <a:spcBef>
+                <a:spcPts val="300"/>
+              </a:spcBef>
+              <a:spcAft>
+                <a:spcPts val="300"/>
+              </a:spcAft>
+              <a:buNone/>
+            </a:pPr>
+            <a:r>
+              <a:rPr lang="en-US" sz="1300" dirty="0">
+                <a:solidFill>
+                  <a:srgbClr val="1C2833"/>
+                </a:solidFill>
+                <a:latin typeface="Georgia" pitchFamily="34" charset="0"/>
+                <a:ea typeface="Georgia" pitchFamily="34" charset="-122"/>
+                <a:cs typeface="Georgia" pitchFamily="34" charset="-120"/>
+              </a:rPr>
+              <a:t> method, exactly as for the 3×3 — the rule does not change with size, as long as </a:t>
+            </a:r>
+            <a:pPr algn="l" indent="0" marL="0">
+              <a:lnSpc>
+                <a:spcPts val="1820"/>
+              </a:lnSpc>
+              <a:spcBef>
+                <a:spcPts val="300"/>
+              </a:spcBef>
+              <a:spcAft>
+                <a:spcPts val="300"/>
+              </a:spcAft>
+              <a:buNone/>
+            </a:pPr>
+            <a:r>
+              <a:rPr lang="en-US" sz="1300" i="1" dirty="0">
+                <a:solidFill>
+                  <a:srgbClr val="1C2833"/>
+                </a:solidFill>
+                <a:latin typeface="Georgia" pitchFamily="34" charset="0"/>
+                <a:ea typeface="Georgia" pitchFamily="34" charset="-122"/>
+                <a:cs typeface="Georgia" pitchFamily="34" charset="-120"/>
+              </a:rPr>
+              <a:t>n</a:t>
+            </a:r>
+            <a:pPr algn="l" indent="0" marL="0">
+              <a:lnSpc>
+                <a:spcPts val="1820"/>
+              </a:lnSpc>
+              <a:spcBef>
+                <a:spcPts val="300"/>
+              </a:spcBef>
+              <a:spcAft>
+                <a:spcPts val="300"/>
+              </a:spcAft>
+              <a:buNone/>
+            </a:pPr>
+            <a:r>
+              <a:rPr lang="en-US" sz="1300" dirty="0">
+                <a:solidFill>
+                  <a:srgbClr val="1C2833"/>
+                </a:solidFill>
+                <a:latin typeface="Georgia" pitchFamily="34" charset="0"/>
+                <a:ea typeface="Georgia" pitchFamily="34" charset="-122"/>
+                <a:cs typeface="Georgia" pitchFamily="34" charset="-120"/>
+              </a:rPr>
+              <a:t> is odd.</a:t>
+            </a:r>
+            <a:endParaRPr lang="en-US" sz="1300" dirty="0"/>
+          </a:p>
+        </p:txBody>
+      </p:sp>
+      <p:sp>
+        <p:nvSpPr>
+          <p:cNvPr id="10" name="Text 8"/>
+          <p:cNvSpPr/>
+          <p:nvPr/>
+        </p:nvSpPr>
+        <p:spPr>
+          <a:xfrm>
+            <a:off x="406301" y="4434929"/>
+            <a:ext cx="8498026" cy="213271"/>
+          </a:xfrm>
+          <a:prstGeom prst="rect">
+            <a:avLst/>
+          </a:prstGeom>
+          <a:noFill/>
+          <a:ln/>
+        </p:spPr>
+        <p:txBody>
+          <a:bodyPr wrap="square" lIns="0" tIns="0" rIns="0" bIns="0" rtlCol="0" anchor="t"/>
+          <a:lstStyle/>
+          <a:p>
+            <a:pPr algn="l" indent="0" marL="0">
+              <a:lnSpc>
+                <a:spcPts val="1680"/>
+              </a:lnSpc>
+              <a:spcBef>
+                <a:spcPts val="300"/>
+              </a:spcBef>
+              <a:spcAft>
+                <a:spcPts val="300"/>
+              </a:spcAft>
+              <a:buNone/>
+            </a:pPr>
+            <a:r>
+              <a:rPr lang="en-US" sz="1200" dirty="0">
+                <a:solidFill>
+                  <a:srgbClr val="1C2833"/>
+                </a:solidFill>
+                <a:latin typeface="Arial" pitchFamily="34" charset="0"/>
+                <a:ea typeface="Arial" pitchFamily="34" charset="-122"/>
+                <a:cs typeface="Arial" pitchFamily="34" charset="-120"/>
+              </a:rPr>
+              <a:t>Middle ·  · IKS Curriculum</a:t>
+            </a:r>
+            <a:endParaRPr lang="en-US" sz="1200" dirty="0"/>
+          </a:p>
+        </p:txBody>
+      </p:sp>
+    </p:spTree>
+  </p:cSld>
+  <p:clrMapOvr>
+    <a:masterClrMapping/>
+  </p:clrMapOvr>
+</p:sld>
+</file>
+
+<file path=ppt/slides/slide14.xml><?xml version="1.0" encoding="utf-8"?>
+<p:sld xmlns:a="http://schemas.openxmlformats.org/drawingml/2006/main" xmlns:r="http://schemas.openxmlformats.org/officeDocument/2006/relationships" xmlns:p="http://schemas.openxmlformats.org/presentationml/2006/main">
+  <p:cSld name="Slide 14">
+    <p:bg>
+      <p:bgPr>
+        <a:solidFill>
+          <a:srgbClr val="FFFFFF"/>
+        </a:solidFill>
+      </p:bgPr>
+    </p:bg>
+    <p:spTree>
+      <p:nvGrpSpPr>
+        <p:cNvPr id="1" name=""/>
+        <p:cNvGrpSpPr/>
+        <p:nvPr/>
+      </p:nvGrpSpPr>
+      <p:grpSpPr>
+        <a:xfrm>
+          <a:off x="0" y="0"/>
+          <a:ext cx="0" cy="0"/>
+          <a:chOff x="0" y="0"/>
+          <a:chExt cx="0" cy="0"/>
+        </a:xfrm>
+      </p:grpSpPr>
+      <p:sp>
+        <p:nvSpPr>
+          <p:cNvPr id="2" name="Text 0"/>
+          <p:cNvSpPr/>
+          <p:nvPr/>
+        </p:nvSpPr>
+        <p:spPr>
+          <a:xfrm>
+            <a:off x="0" y="0"/>
+            <a:ext cx="9144000" cy="101501"/>
+          </a:xfrm>
+          <a:prstGeom prst="rect">
+            <a:avLst/>
+          </a:prstGeom>
+          <a:solidFill>
+            <a:srgbClr val="277884"/>
+          </a:solidFill>
+          <a:ln/>
+        </p:spPr>
+        <p:txBody>
+          <a:bodyPr wrap="square" rtlCol="0" anchor="ctr"/>
+          <a:lstStyle/>
+          <a:p>
+            <a:pPr indent="0" marL="0">
+              <a:buNone/>
+            </a:pPr>
+            <a:endParaRPr lang="en-US" dirty="0"/>
+          </a:p>
+        </p:txBody>
+      </p:sp>
+      <p:sp>
+        <p:nvSpPr>
+          <p:cNvPr id="3" name="Text 1"/>
+          <p:cNvSpPr/>
+          <p:nvPr/>
+        </p:nvSpPr>
+        <p:spPr>
+          <a:xfrm>
+            <a:off x="406301" y="457051"/>
+            <a:ext cx="8498026" cy="274290"/>
+          </a:xfrm>
+          <a:prstGeom prst="rect">
+            <a:avLst/>
+          </a:prstGeom>
+          <a:noFill/>
+          <a:ln/>
+        </p:spPr>
+        <p:txBody>
+          <a:bodyPr wrap="square" lIns="0" tIns="0" rIns="0" bIns="0" rtlCol="0" anchor="t"/>
+          <a:lstStyle/>
+          <a:p>
+            <a:pPr algn="l" indent="0" marL="0">
+              <a:lnSpc>
+                <a:spcPts val="2160"/>
+              </a:lnSpc>
+              <a:spcBef>
+                <a:spcPts val="600"/>
+              </a:spcBef>
+              <a:spcAft>
+                <a:spcPts val="800"/>
+              </a:spcAft>
+              <a:buNone/>
+            </a:pPr>
+            <a:r>
+              <a:rPr lang="en-US" sz="1800" b="1" dirty="0">
+                <a:solidFill>
+                  <a:srgbClr val="FE4447"/>
+                </a:solidFill>
+                <a:latin typeface="Georgia" pitchFamily="34" charset="0"/>
+                <a:ea typeface="Georgia" pitchFamily="34" charset="-122"/>
+                <a:cs typeface="Georgia" pitchFamily="34" charset="-120"/>
+              </a:rPr>
+              <a:t>Homework</a:t>
+            </a:r>
+            <a:endParaRPr lang="en-US" sz="1800" dirty="0"/>
+          </a:p>
+        </p:txBody>
+      </p:sp>
+      <p:sp>
+        <p:nvSpPr>
+          <p:cNvPr id="4" name="Text 2"/>
+          <p:cNvSpPr/>
+          <p:nvPr/>
+        </p:nvSpPr>
+        <p:spPr>
+          <a:xfrm>
+            <a:off x="634901" y="883593"/>
+            <a:ext cx="8102798" cy="487561"/>
+          </a:xfrm>
+          <a:prstGeom prst="rect">
+            <a:avLst/>
+          </a:prstGeom>
+          <a:noFill/>
+          <a:ln/>
+        </p:spPr>
+        <p:txBody>
+          <a:bodyPr wrap="square" lIns="0" tIns="0" rIns="0" bIns="0" rtlCol="0" anchor="t"/>
+          <a:lstStyle/>
+          <a:p>
+            <a:pPr algn="l" marL="342900" indent="-342900">
+              <a:lnSpc>
+                <a:spcPts val="1620"/>
+              </a:lnSpc>
+              <a:spcAft>
+                <a:spcPts val="300"/>
+              </a:spcAft>
+              <a:buSzPct val="100000"/>
+              <a:buChar char="•"/>
+            </a:pPr>
+            <a:r>
+              <a:rPr lang="en-US" sz="1200" dirty="0">
+                <a:solidFill>
+                  <a:srgbClr val="1C2833"/>
+                </a:solidFill>
+                <a:latin typeface="Arial" pitchFamily="34" charset="0"/>
+                <a:ea typeface="Arial" pitchFamily="34" charset="-122"/>
+                <a:cs typeface="Arial" pitchFamily="34" charset="-120"/>
+              </a:rPr>
+              <a:t>Construct a 7×7 magic square using the stair-step method. The magic constant should be 175. Yes, it takes time — work patiently. Bring it tomorrow for spot-checks.</a:t>
+            </a:r>
+            <a:endParaRPr lang="en-US" sz="1200" dirty="0"/>
+          </a:p>
+        </p:txBody>
+      </p:sp>
+      <p:sp>
+        <p:nvSpPr>
+          <p:cNvPr id="5" name="Text 3"/>
+          <p:cNvSpPr/>
+          <p:nvPr/>
+        </p:nvSpPr>
+        <p:spPr>
+          <a:xfrm>
+            <a:off x="406301" y="4434929"/>
+            <a:ext cx="8498026" cy="213271"/>
+          </a:xfrm>
+          <a:prstGeom prst="rect">
+            <a:avLst/>
+          </a:prstGeom>
+          <a:noFill/>
+          <a:ln/>
+        </p:spPr>
+        <p:txBody>
+          <a:bodyPr wrap="square" lIns="0" tIns="0" rIns="0" bIns="0" rtlCol="0" anchor="t"/>
+          <a:lstStyle/>
+          <a:p>
+            <a:pPr algn="l" indent="0" marL="0">
+              <a:lnSpc>
+                <a:spcPts val="1680"/>
+              </a:lnSpc>
+              <a:spcBef>
+                <a:spcPts val="300"/>
+              </a:spcBef>
+              <a:spcAft>
+                <a:spcPts val="300"/>
+              </a:spcAft>
+              <a:buNone/>
+            </a:pPr>
+            <a:r>
+              <a:rPr lang="en-US" sz="1200" dirty="0">
+                <a:solidFill>
+                  <a:srgbClr val="1C2833"/>
+                </a:solidFill>
+                <a:latin typeface="Arial" pitchFamily="34" charset="0"/>
+                <a:ea typeface="Arial" pitchFamily="34" charset="-122"/>
+                <a:cs typeface="Arial" pitchFamily="34" charset="-120"/>
+              </a:rPr>
+              <a:t>Middle ·  · IKS Curriculum</a:t>
+            </a:r>
+            <a:endParaRPr lang="en-US" sz="1200" dirty="0"/>
+          </a:p>
+        </p:txBody>
+      </p:sp>
+    </p:spTree>
+  </p:cSld>
+  <p:clrMapOvr>
+    <a:masterClrMapping/>
+  </p:clrMapOvr>
+</p:sld>
+</file>
+
+<file path=ppt/slides/slide15.xml><?xml version="1.0" encoding="utf-8"?>
+<p:sld xmlns:a="http://schemas.openxmlformats.org/drawingml/2006/main" xmlns:r="http://schemas.openxmlformats.org/officeDocument/2006/relationships" xmlns:p="http://schemas.openxmlformats.org/presentationml/2006/main">
+  <p:cSld name="Slide 15">
+    <p:bg>
+      <p:bgPr>
+        <a:solidFill>
+          <a:srgbClr val="FFFFFF"/>
+        </a:solidFill>
+      </p:bgPr>
+    </p:bg>
+    <p:spTree>
+      <p:nvGrpSpPr>
+        <p:cNvPr id="1" name=""/>
+        <p:cNvGrpSpPr/>
+        <p:nvPr/>
+      </p:nvGrpSpPr>
+      <p:grpSpPr>
+        <a:xfrm>
+          <a:off x="0" y="0"/>
+          <a:ext cx="0" cy="0"/>
+          <a:chOff x="0" y="0"/>
+          <a:chExt cx="0" cy="0"/>
+        </a:xfrm>
+      </p:grpSpPr>
+      <p:sp>
+        <p:nvSpPr>
+          <p:cNvPr id="2" name="Text 0"/>
+          <p:cNvSpPr/>
+          <p:nvPr/>
+        </p:nvSpPr>
+        <p:spPr>
+          <a:xfrm>
+            <a:off x="0" y="0"/>
+            <a:ext cx="9144000" cy="101501"/>
+          </a:xfrm>
+          <a:prstGeom prst="rect">
+            <a:avLst/>
+          </a:prstGeom>
+          <a:solidFill>
+            <a:srgbClr val="277884"/>
+          </a:solidFill>
+          <a:ln/>
+        </p:spPr>
+        <p:txBody>
+          <a:bodyPr wrap="square" rtlCol="0" anchor="ctr"/>
+          <a:lstStyle/>
+          <a:p>
+            <a:pPr indent="0" marL="0">
+              <a:buNone/>
+            </a:pPr>
+            <a:endParaRPr lang="en-US" dirty="0"/>
+          </a:p>
+        </p:txBody>
+      </p:sp>
+      <p:sp>
+        <p:nvSpPr>
+          <p:cNvPr id="3" name="Text 1"/>
+          <p:cNvSpPr/>
+          <p:nvPr/>
+        </p:nvSpPr>
+        <p:spPr>
+          <a:xfrm>
+            <a:off x="406301" y="457051"/>
+            <a:ext cx="8498026" cy="274290"/>
+          </a:xfrm>
+          <a:prstGeom prst="rect">
+            <a:avLst/>
+          </a:prstGeom>
+          <a:noFill/>
+          <a:ln/>
+        </p:spPr>
+        <p:txBody>
+          <a:bodyPr wrap="square" lIns="0" tIns="0" rIns="0" bIns="0" rtlCol="0" anchor="t"/>
+          <a:lstStyle/>
+          <a:p>
+            <a:pPr algn="l" indent="0" marL="0">
+              <a:lnSpc>
+                <a:spcPts val="2160"/>
+              </a:lnSpc>
+              <a:spcBef>
+                <a:spcPts val="600"/>
+              </a:spcBef>
+              <a:spcAft>
+                <a:spcPts val="800"/>
+              </a:spcAft>
+              <a:buNone/>
+            </a:pPr>
+            <a:r>
+              <a:rPr lang="en-US" sz="1800" b="1" dirty="0">
+                <a:solidFill>
+                  <a:srgbClr val="FE4447"/>
+                </a:solidFill>
+                <a:latin typeface="Georgia" pitchFamily="34" charset="0"/>
+                <a:ea typeface="Georgia" pitchFamily="34" charset="-122"/>
+                <a:cs typeface="Georgia" pitchFamily="34" charset="-120"/>
+              </a:rPr>
+              <a:t>Differentiation</a:t>
+            </a:r>
+            <a:endParaRPr lang="en-US" sz="1800" dirty="0"/>
+          </a:p>
+        </p:txBody>
+      </p:sp>
+      <p:sp>
+        <p:nvSpPr>
+          <p:cNvPr id="4" name="Text 2"/>
+          <p:cNvSpPr/>
+          <p:nvPr/>
+        </p:nvSpPr>
+        <p:spPr>
+          <a:xfrm>
+            <a:off x="634901" y="883593"/>
+            <a:ext cx="8102798" cy="525661"/>
+          </a:xfrm>
+          <a:prstGeom prst="rect">
+            <a:avLst/>
+          </a:prstGeom>
+          <a:noFill/>
+          <a:ln/>
+        </p:spPr>
+        <p:txBody>
+          <a:bodyPr wrap="square" lIns="0" tIns="0" rIns="0" bIns="0" rtlCol="0" anchor="t"/>
+          <a:lstStyle/>
+          <a:p>
+            <a:pPr algn="l" marL="342900" indent="-342900">
+              <a:lnSpc>
+                <a:spcPts val="1620"/>
+              </a:lnSpc>
+              <a:spcAft>
+                <a:spcPts val="300"/>
+              </a:spcAft>
+              <a:buSzPct val="100000"/>
+              <a:buChar char="•"/>
+            </a:pPr>
+            <a:r>
+              <a:rPr lang="en-US" sz="1200" b="1" dirty="0">
+                <a:solidFill>
+                  <a:srgbClr val="1C2833"/>
+                </a:solidFill>
+                <a:latin typeface="Arial" pitchFamily="34" charset="0"/>
+                <a:ea typeface="Arial" pitchFamily="34" charset="-122"/>
+                <a:cs typeface="Arial" pitchFamily="34" charset="-120"/>
+              </a:rPr>
+              <a:t>One tier up:</a:t>
+            </a:r>
+            <a:pPr algn="l" indent="0" marL="0">
+              <a:lnSpc>
+                <a:spcPts val="1620"/>
+              </a:lnSpc>
+              <a:spcAft>
+                <a:spcPts val="300"/>
+              </a:spcAft>
+              <a:buNone/>
+            </a:pPr>
+            <a:r>
+              <a:rPr lang="en-US" sz="1200" dirty="0">
+                <a:solidFill>
+                  <a:srgbClr val="1C2833"/>
+                </a:solidFill>
+                <a:latin typeface="Arial" pitchFamily="34" charset="0"/>
+                <a:ea typeface="Arial" pitchFamily="34" charset="-122"/>
+                <a:cs typeface="Arial" pitchFamily="34" charset="-120"/>
+              </a:rPr>
+              <a:t> Construct a 9×9 magic square. Constant = 369. Time it.</a:t>
+            </a:r>
+            <a:endParaRPr lang="en-US" sz="1200" dirty="0"/>
+          </a:p>
+          <a:p>
+            <a:pPr algn="l" marL="342900" indent="-342900">
+              <a:lnSpc>
+                <a:spcPts val="1620"/>
+              </a:lnSpc>
+              <a:spcAft>
+                <a:spcPts val="300"/>
+              </a:spcAft>
+              <a:buSzPct val="100000"/>
+              <a:buChar char="•"/>
+            </a:pPr>
+            <a:r>
+              <a:rPr lang="en-US" sz="1200" b="1" dirty="0">
+                <a:solidFill>
+                  <a:srgbClr val="1C2833"/>
+                </a:solidFill>
+                <a:latin typeface="Arial" pitchFamily="34" charset="0"/>
+                <a:ea typeface="Arial" pitchFamily="34" charset="-122"/>
+                <a:cs typeface="Arial" pitchFamily="34" charset="-120"/>
+              </a:rPr>
+              <a:t>One tier down:</a:t>
+            </a:r>
+            <a:pPr algn="l" indent="0" marL="0">
+              <a:lnSpc>
+                <a:spcPts val="1620"/>
+              </a:lnSpc>
+              <a:spcAft>
+                <a:spcPts val="300"/>
+              </a:spcAft>
+              <a:buNone/>
+            </a:pPr>
+            <a:r>
+              <a:rPr lang="en-US" sz="1200" dirty="0">
+                <a:solidFill>
+                  <a:srgbClr val="1C2833"/>
+                </a:solidFill>
+                <a:latin typeface="Arial" pitchFamily="34" charset="0"/>
+                <a:ea typeface="Arial" pitchFamily="34" charset="-122"/>
+                <a:cs typeface="Arial" pitchFamily="34" charset="-120"/>
+              </a:rPr>
+              <a:t> Construct another 5×5, slowly, with the rule sheet visible. Speed is not the goal yet.</a:t>
+            </a:r>
+            <a:endParaRPr lang="en-US" sz="1200" dirty="0"/>
+          </a:p>
+        </p:txBody>
+      </p:sp>
+      <p:sp>
+        <p:nvSpPr>
+          <p:cNvPr id="5" name="Text 3"/>
+          <p:cNvSpPr/>
+          <p:nvPr/>
+        </p:nvSpPr>
+        <p:spPr>
+          <a:xfrm>
+            <a:off x="406301" y="4434929"/>
+            <a:ext cx="8498026" cy="213271"/>
+          </a:xfrm>
+          <a:prstGeom prst="rect">
+            <a:avLst/>
+          </a:prstGeom>
+          <a:noFill/>
+          <a:ln/>
+        </p:spPr>
+        <p:txBody>
+          <a:bodyPr wrap="square" lIns="0" tIns="0" rIns="0" bIns="0" rtlCol="0" anchor="t"/>
+          <a:lstStyle/>
+          <a:p>
+            <a:pPr algn="l" indent="0" marL="0">
+              <a:lnSpc>
+                <a:spcPts val="1680"/>
+              </a:lnSpc>
+              <a:spcBef>
+                <a:spcPts val="300"/>
+              </a:spcBef>
+              <a:spcAft>
+                <a:spcPts val="300"/>
+              </a:spcAft>
+              <a:buNone/>
+            </a:pPr>
+            <a:r>
+              <a:rPr lang="en-US" sz="1200" dirty="0">
+                <a:solidFill>
+                  <a:srgbClr val="1C2833"/>
+                </a:solidFill>
+                <a:latin typeface="Arial" pitchFamily="34" charset="0"/>
+                <a:ea typeface="Arial" pitchFamily="34" charset="-122"/>
+                <a:cs typeface="Arial" pitchFamily="34" charset="-120"/>
+              </a:rPr>
+              <a:t>Middle ·  · IKS Curriculum</a:t>
+            </a:r>
+            <a:endParaRPr lang="en-US" sz="1200" dirty="0"/>
+          </a:p>
+        </p:txBody>
+      </p:sp>
+    </p:spTree>
+  </p:cSld>
+  <p:clrMapOvr>
+    <a:masterClrMapping/>
+  </p:clrMapOvr>
+</p:sld>
+</file>
+
+<file path=ppt/slides/slide16.xml><?xml version="1.0" encoding="utf-8"?>
+<p:sld xmlns:a="http://schemas.openxmlformats.org/drawingml/2006/main" xmlns:r="http://schemas.openxmlformats.org/officeDocument/2006/relationships" xmlns:p="http://schemas.openxmlformats.org/presentationml/2006/main">
+  <p:cSld name="Slide 16">
+    <p:bg>
+      <p:bgPr>
+        <a:solidFill>
+          <a:srgbClr val="FFFFFF"/>
+        </a:solidFill>
+      </p:bgPr>
+    </p:bg>
+    <p:spTree>
+      <p:nvGrpSpPr>
+        <p:cNvPr id="1" name=""/>
+        <p:cNvGrpSpPr/>
+        <p:nvPr/>
+      </p:nvGrpSpPr>
+      <p:grpSpPr>
+        <a:xfrm>
+          <a:off x="0" y="0"/>
+          <a:ext cx="0" cy="0"/>
+          <a:chOff x="0" y="0"/>
+          <a:chExt cx="0" cy="0"/>
+        </a:xfrm>
+      </p:grpSpPr>
+      <p:sp>
+        <p:nvSpPr>
+          <p:cNvPr id="2" name="Text 0"/>
+          <p:cNvSpPr/>
+          <p:nvPr/>
+        </p:nvSpPr>
+        <p:spPr>
+          <a:xfrm>
+            <a:off x="0" y="0"/>
+            <a:ext cx="9144000" cy="101501"/>
+          </a:xfrm>
+          <a:prstGeom prst="rect">
+            <a:avLst/>
+          </a:prstGeom>
+          <a:solidFill>
+            <a:srgbClr val="277884"/>
+          </a:solidFill>
+          <a:ln/>
+        </p:spPr>
+        <p:txBody>
+          <a:bodyPr wrap="square" rtlCol="0" anchor="ctr"/>
+          <a:lstStyle/>
+          <a:p>
+            <a:pPr indent="0" marL="0">
+              <a:buNone/>
+            </a:pPr>
+            <a:endParaRPr lang="en-US" dirty="0"/>
+          </a:p>
+        </p:txBody>
+      </p:sp>
+      <p:sp>
+        <p:nvSpPr>
+          <p:cNvPr id="3" name="Text 1"/>
+          <p:cNvSpPr/>
+          <p:nvPr/>
+        </p:nvSpPr>
+        <p:spPr>
+          <a:xfrm>
+            <a:off x="406301" y="457051"/>
+            <a:ext cx="8498026" cy="274290"/>
+          </a:xfrm>
+          <a:prstGeom prst="rect">
+            <a:avLst/>
+          </a:prstGeom>
+          <a:noFill/>
+          <a:ln/>
+        </p:spPr>
+        <p:txBody>
+          <a:bodyPr wrap="square" lIns="0" tIns="0" rIns="0" bIns="0" rtlCol="0" anchor="t"/>
+          <a:lstStyle/>
+          <a:p>
+            <a:pPr algn="l" indent="0" marL="0">
+              <a:lnSpc>
+                <a:spcPts val="2160"/>
+              </a:lnSpc>
+              <a:spcBef>
+                <a:spcPts val="600"/>
+              </a:spcBef>
+              <a:spcAft>
+                <a:spcPts val="800"/>
+              </a:spcAft>
+              <a:buNone/>
+            </a:pPr>
+            <a:r>
+              <a:rPr lang="en-US" sz="1800" b="1" dirty="0">
+                <a:solidFill>
+                  <a:srgbClr val="FE4447"/>
+                </a:solidFill>
+                <a:latin typeface="Georgia" pitchFamily="34" charset="0"/>
+                <a:ea typeface="Georgia" pitchFamily="34" charset="-122"/>
+                <a:cs typeface="Georgia" pitchFamily="34" charset="-120"/>
+              </a:rPr>
+              <a:t>Teacher notes</a:t>
+            </a:r>
+            <a:endParaRPr lang="en-US" sz="1800" dirty="0"/>
+          </a:p>
+        </p:txBody>
+      </p:sp>
+      <p:sp>
+        <p:nvSpPr>
+          <p:cNvPr id="4" name="Text 2"/>
+          <p:cNvSpPr/>
+          <p:nvPr/>
+        </p:nvSpPr>
+        <p:spPr>
+          <a:xfrm>
+            <a:off x="634901" y="883593"/>
+            <a:ext cx="8102798" cy="1592163"/>
+          </a:xfrm>
+          <a:prstGeom prst="rect">
+            <a:avLst/>
+          </a:prstGeom>
+          <a:noFill/>
+          <a:ln/>
+        </p:spPr>
+        <p:txBody>
+          <a:bodyPr wrap="square" lIns="0" tIns="0" rIns="0" bIns="0" rtlCol="0" anchor="t"/>
+          <a:lstStyle/>
+          <a:p>
+            <a:pPr algn="l" marL="342900" indent="-342900">
+              <a:lnSpc>
+                <a:spcPts val="1620"/>
+              </a:lnSpc>
+              <a:spcAft>
+                <a:spcPts val="300"/>
+              </a:spcAft>
+              <a:buSzPct val="100000"/>
+              <a:buChar char="•"/>
+            </a:pPr>
+            <a:r>
+              <a:rPr lang="en-US" sz="1200" dirty="0">
+                <a:solidFill>
+                  <a:srgbClr val="1C2833"/>
+                </a:solidFill>
+                <a:latin typeface="Arial" pitchFamily="34" charset="0"/>
+                <a:ea typeface="Arial" pitchFamily="34" charset="-122"/>
+                <a:cs typeface="Arial" pitchFamily="34" charset="-120"/>
+              </a:rPr>
+              <a:t>For the live demonstration, use a slow pace and check student-following frequently — "where would 2 go?" "is that cell filled?"</a:t>
+            </a:r>
+            <a:endParaRPr lang="en-US" sz="1200" dirty="0"/>
+          </a:p>
+          <a:p>
+            <a:pPr algn="l" marL="342900" indent="-342900">
+              <a:lnSpc>
+                <a:spcPts val="1620"/>
+              </a:lnSpc>
+              <a:spcAft>
+                <a:spcPts val="300"/>
+              </a:spcAft>
+              <a:buSzPct val="100000"/>
+              <a:buChar char="•"/>
+            </a:pPr>
+            <a:r>
+              <a:rPr lang="en-US" sz="1200" dirty="0">
+                <a:solidFill>
+                  <a:srgbClr val="1C2833"/>
+                </a:solidFill>
+                <a:latin typeface="Arial" pitchFamily="34" charset="0"/>
+                <a:ea typeface="Arial" pitchFamily="34" charset="-122"/>
+                <a:cs typeface="Arial" pitchFamily="34" charset="-120"/>
+              </a:rPr>
+              <a:t>Students may resist because "I already built one at home." Push them to </a:t>
+            </a:r>
+            <a:pPr algn="l" indent="0" marL="0">
+              <a:lnSpc>
+                <a:spcPts val="1620"/>
+              </a:lnSpc>
+              <a:spcAft>
+                <a:spcPts val="300"/>
+              </a:spcAft>
+              <a:buNone/>
+            </a:pPr>
+            <a:r>
+              <a:rPr lang="en-US" sz="1200" i="1" dirty="0">
+                <a:solidFill>
+                  <a:srgbClr val="1C2833"/>
+                </a:solidFill>
+                <a:latin typeface="Arial" pitchFamily="34" charset="0"/>
+                <a:ea typeface="Arial" pitchFamily="34" charset="-122"/>
+                <a:cs typeface="Arial" pitchFamily="34" charset="-120"/>
+              </a:rPr>
+              <a:t>re-build</a:t>
+            </a:r>
+            <a:pPr algn="l" indent="0" marL="0">
+              <a:lnSpc>
+                <a:spcPts val="1620"/>
+              </a:lnSpc>
+              <a:spcAft>
+                <a:spcPts val="300"/>
+              </a:spcAft>
+              <a:buNone/>
+            </a:pPr>
+            <a:r>
+              <a:rPr lang="en-US" sz="1200" dirty="0">
+                <a:solidFill>
+                  <a:srgbClr val="1C2833"/>
+                </a:solidFill>
+                <a:latin typeface="Arial" pitchFamily="34" charset="0"/>
+                <a:ea typeface="Arial" pitchFamily="34" charset="-122"/>
+                <a:cs typeface="Arial" pitchFamily="34" charset="-120"/>
+              </a:rPr>
+              <a:t> it on the board — narrating the rule reinforces it.</a:t>
+            </a:r>
+            <a:endParaRPr lang="en-US" sz="1200" dirty="0"/>
+          </a:p>
+          <a:p>
+            <a:pPr algn="l" marL="342900" indent="-342900">
+              <a:lnSpc>
+                <a:spcPts val="1620"/>
+              </a:lnSpc>
+              <a:spcAft>
+                <a:spcPts val="300"/>
+              </a:spcAft>
+              <a:buSzPct val="100000"/>
+              <a:buChar char="•"/>
+            </a:pPr>
+            <a:r>
+              <a:rPr lang="en-US" sz="1200" dirty="0">
+                <a:solidFill>
+                  <a:srgbClr val="1C2833"/>
+                </a:solidFill>
+                <a:latin typeface="Arial" pitchFamily="34" charset="0"/>
+                <a:ea typeface="Arial" pitchFamily="34" charset="-122"/>
+                <a:cs typeface="Arial" pitchFamily="34" charset="-120"/>
+              </a:rPr>
+              <a:t>A few students will produce mirror-image squares because they reversed the up-right direction. Show that mirror images are also valid magic squares (by symmetry from Day 3) — but consistency matters when you're describing the algorithm.</a:t>
+            </a:r>
+            <a:endParaRPr lang="en-US" sz="1200" dirty="0"/>
+          </a:p>
+        </p:txBody>
+      </p:sp>
+      <p:sp>
+        <p:nvSpPr>
+          <p:cNvPr id="5" name="Text 3"/>
+          <p:cNvSpPr/>
+          <p:nvPr/>
+        </p:nvSpPr>
+        <p:spPr>
+          <a:xfrm>
+            <a:off x="406301" y="4434929"/>
+            <a:ext cx="8498026" cy="213271"/>
+          </a:xfrm>
+          <a:prstGeom prst="rect">
+            <a:avLst/>
+          </a:prstGeom>
+          <a:noFill/>
+          <a:ln/>
+        </p:spPr>
+        <p:txBody>
+          <a:bodyPr wrap="square" lIns="0" tIns="0" rIns="0" bIns="0" rtlCol="0" anchor="t"/>
+          <a:lstStyle/>
+          <a:p>
+            <a:pPr algn="l" indent="0" marL="0">
+              <a:lnSpc>
+                <a:spcPts val="1680"/>
+              </a:lnSpc>
+              <a:spcBef>
+                <a:spcPts val="300"/>
+              </a:spcBef>
+              <a:spcAft>
+                <a:spcPts val="300"/>
+              </a:spcAft>
+              <a:buNone/>
+            </a:pPr>
+            <a:r>
+              <a:rPr lang="en-US" sz="1200" dirty="0">
+                <a:solidFill>
+                  <a:srgbClr val="1C2833"/>
+                </a:solidFill>
+                <a:latin typeface="Arial" pitchFamily="34" charset="0"/>
+                <a:ea typeface="Arial" pitchFamily="34" charset="-122"/>
+                <a:cs typeface="Arial" pitchFamily="34" charset="-120"/>
+              </a:rPr>
+              <a:t>Middle ·  · IKS Curriculum</a:t>
+            </a:r>
+            <a:endParaRPr lang="en-US" sz="1200" dirty="0"/>
+          </a:p>
+        </p:txBody>
+      </p:sp>
+    </p:spTree>
+  </p:cSld>
+  <p:clrMapOvr>
+    <a:masterClrMapping/>
+  </p:clrMapOvr>
+</p:sld>
+</file>
+
+<file path=ppt/slides/slide17.xml><?xml version="1.0" encoding="utf-8"?>
+<p:sld xmlns:a="http://schemas.openxmlformats.org/drawingml/2006/main" xmlns:r="http://schemas.openxmlformats.org/officeDocument/2006/relationships" xmlns:p="http://schemas.openxmlformats.org/presentationml/2006/main">
+  <p:cSld name="Slide 17">
+    <p:bg>
+      <p:bgPr>
+        <a:solidFill>
+          <a:srgbClr val="FFFFFF"/>
+        </a:solidFill>
+      </p:bgPr>
+    </p:bg>
+    <p:spTree>
+      <p:nvGrpSpPr>
+        <p:cNvPr id="1" name=""/>
+        <p:cNvGrpSpPr/>
+        <p:nvPr/>
+      </p:nvGrpSpPr>
+      <p:grpSpPr>
+        <a:xfrm>
+          <a:off x="0" y="0"/>
+          <a:ext cx="0" cy="0"/>
+          <a:chOff x="0" y="0"/>
+          <a:chExt cx="0" cy="0"/>
+        </a:xfrm>
+      </p:grpSpPr>
+      <p:sp>
+        <p:nvSpPr>
+          <p:cNvPr id="2" name="Text 0"/>
+          <p:cNvSpPr/>
+          <p:nvPr/>
+        </p:nvSpPr>
+        <p:spPr>
+          <a:xfrm>
+            <a:off x="0" y="0"/>
+            <a:ext cx="9144000" cy="101501"/>
+          </a:xfrm>
+          <a:prstGeom prst="rect">
+            <a:avLst/>
+          </a:prstGeom>
+          <a:solidFill>
+            <a:srgbClr val="277884"/>
+          </a:solidFill>
+          <a:ln/>
+        </p:spPr>
+        <p:txBody>
+          <a:bodyPr wrap="square" rtlCol="0" anchor="ctr"/>
+          <a:lstStyle/>
+          <a:p>
+            <a:pPr indent="0" marL="0">
+              <a:buNone/>
+            </a:pPr>
+            <a:endParaRPr lang="en-US" dirty="0"/>
+          </a:p>
+        </p:txBody>
+      </p:sp>
+      <p:sp>
+        <p:nvSpPr>
+          <p:cNvPr id="3" name="Text 1"/>
+          <p:cNvSpPr/>
+          <p:nvPr/>
+        </p:nvSpPr>
+        <p:spPr>
+          <a:xfrm>
+            <a:off x="406301" y="457051"/>
+            <a:ext cx="8498026" cy="274290"/>
+          </a:xfrm>
+          <a:prstGeom prst="rect">
+            <a:avLst/>
+          </a:prstGeom>
+          <a:noFill/>
+          <a:ln/>
+        </p:spPr>
+        <p:txBody>
+          <a:bodyPr wrap="square" lIns="0" tIns="0" rIns="0" bIns="0" rtlCol="0" anchor="t"/>
+          <a:lstStyle/>
+          <a:p>
+            <a:pPr algn="l" indent="0" marL="0">
+              <a:lnSpc>
+                <a:spcPts val="2160"/>
+              </a:lnSpc>
+              <a:spcBef>
+                <a:spcPts val="600"/>
+              </a:spcBef>
+              <a:spcAft>
+                <a:spcPts val="800"/>
+              </a:spcAft>
+              <a:buNone/>
+            </a:pPr>
+            <a:r>
+              <a:rPr lang="en-US" sz="1800" b="1" dirty="0">
+                <a:solidFill>
+                  <a:srgbClr val="FE4447"/>
+                </a:solidFill>
+                <a:latin typeface="Georgia" pitchFamily="34" charset="0"/>
+                <a:ea typeface="Georgia" pitchFamily="34" charset="-122"/>
+                <a:cs typeface="Georgia" pitchFamily="34" charset="-120"/>
+              </a:rPr>
               <a:t>Citation(s) used in this lesson</a:t>
             </a:r>
             <a:endParaRPr lang="en-US" sz="1800" dirty="0"/>
@@ -3261,8 +5064,8 @@
         </p:nvSpPr>
         <p:spPr>
           <a:xfrm>
-            <a:off x="406301" y="870942"/>
-            <a:ext cx="8498026" cy="426541"/>
+            <a:off x="634901" y="883593"/>
+            <a:ext cx="8102798" cy="487561"/>
           </a:xfrm>
           <a:prstGeom prst="rect">
             <a:avLst/>
@@ -3274,17 +5077,15 @@
           <a:bodyPr wrap="square" lIns="0" tIns="0" rIns="0" bIns="0" rtlCol="0" anchor="t"/>
           <a:lstStyle/>
           <a:p>
-            <a:pPr algn="l" indent="0" marL="0">
-              <a:lnSpc>
-                <a:spcPts val="1680"/>
-              </a:lnSpc>
-              <a:spcBef>
-                <a:spcPts val="300"/>
-              </a:spcBef>
-              <a:spcAft>
-                <a:spcPts val="300"/>
-              </a:spcAft>
-              <a:buNone/>
+            <a:pPr algn="l" marL="342900" indent="-342900">
+              <a:lnSpc>
+                <a:spcPts val="1620"/>
+              </a:lnSpc>
+              <a:spcAft>
+                <a:spcPts val="300"/>
+              </a:spcAft>
+              <a:buSzPct val="100000"/>
+              <a:buChar char="•"/>
             </a:pPr>
             <a:r>
               <a:rPr lang="en-US" sz="1200" dirty="0">
@@ -3295,15 +5096,12 @@
                 <a:ea typeface="Arial" pitchFamily="34" charset="-122"/>
                 <a:cs typeface="Arial" pitchFamily="34" charset="-120"/>
               </a:rPr>
-              <a:t>– Nārāyaṇa Paṇḍita, </a:t>
-            </a:r>
-            <a:pPr algn="l" indent="0" marL="0">
-              <a:lnSpc>
-                <a:spcPts val="1680"/>
-              </a:lnSpc>
-              <a:spcBef>
-                <a:spcPts val="300"/>
-              </a:spcBef>
+              <a:t>Nārāyaṇa Paṇḍita, </a:t>
+            </a:r>
+            <a:pPr algn="l" indent="0" marL="0">
+              <a:lnSpc>
+                <a:spcPts val="1620"/>
+              </a:lnSpc>
               <a:spcAft>
                 <a:spcPts val="300"/>
               </a:spcAft>
@@ -3322,11 +5120,8 @@
             </a:r>
             <a:pPr algn="l" indent="0" marL="0">
               <a:lnSpc>
-                <a:spcPts val="1680"/>
-              </a:lnSpc>
-              <a:spcBef>
-                <a:spcPts val="300"/>
-              </a:spcBef>
+                <a:spcPts val="1620"/>
+              </a:lnSpc>
               <a:spcAft>
                 <a:spcPts val="300"/>
               </a:spcAft>
@@ -3345,11 +5140,8 @@
             </a:r>
             <a:pPr algn="l" indent="0" marL="0">
               <a:lnSpc>
-                <a:spcPts val="1680"/>
-              </a:lnSpc>
-              <a:spcBef>
-                <a:spcPts val="300"/>
-              </a:spcBef>
+                <a:spcPts val="1620"/>
+              </a:lnSpc>
               <a:spcAft>
                 <a:spcPts val="300"/>
               </a:spcAft>
@@ -3368,11 +5160,8 @@
             </a:r>
             <a:pPr algn="l" indent="0" marL="0">
               <a:lnSpc>
-                <a:spcPts val="1680"/>
-              </a:lnSpc>
-              <a:spcBef>
-                <a:spcPts val="300"/>
-              </a:spcBef>
+                <a:spcPts val="1620"/>
+              </a:lnSpc>
               <a:spcAft>
                 <a:spcPts val="300"/>
               </a:spcAft>
@@ -3545,7 +5334,7 @@
                 <a:ea typeface="Georgia" pitchFamily="34" charset="-122"/>
                 <a:cs typeface="Georgia" pitchFamily="34" charset="-120"/>
               </a:rPr>
-              <a:t>Materials</a:t>
+              <a:t>Learning objective</a:t>
             </a:r>
             <a:endParaRPr lang="en-US" sz="1800" dirty="0"/>
           </a:p>
@@ -3560,7 +5349,7 @@
         <p:spPr>
           <a:xfrm>
             <a:off x="406301" y="870942"/>
-            <a:ext cx="8498026" cy="213271"/>
+            <a:ext cx="8498026" cy="426541"/>
           </a:xfrm>
           <a:prstGeom prst="rect">
             <a:avLst/>
@@ -3593,7 +5382,53 @@
                 <a:ea typeface="Arial" pitchFamily="34" charset="-122"/>
                 <a:cs typeface="Arial" pitchFamily="34" charset="-120"/>
               </a:rPr>
-              <a:t>– Printed blank 5×5 grids (3 per student) – The 5-step rule handout from Day 4 – Stopwatch (for timed second-construction)</a:t>
+              <a:t>By the end of this lesson, students will independently construct a 5×5 magic square using the </a:t>
+            </a:r>
+            <a:pPr algn="l" indent="0" marL="0">
+              <a:lnSpc>
+                <a:spcPts val="1680"/>
+              </a:lnSpc>
+              <a:spcBef>
+                <a:spcPts val="300"/>
+              </a:spcBef>
+              <a:spcAft>
+                <a:spcPts val="300"/>
+              </a:spcAft>
+              <a:buNone/>
+            </a:pPr>
+            <a:r>
+              <a:rPr lang="en-US" sz="1200" i="1" dirty="0">
+                <a:solidFill>
+                  <a:srgbClr val="1C2833"/>
+                </a:solidFill>
+                <a:latin typeface="Arial" pitchFamily="34" charset="0"/>
+                <a:ea typeface="Arial" pitchFamily="34" charset="-122"/>
+                <a:cs typeface="Arial" pitchFamily="34" charset="-120"/>
+              </a:rPr>
+              <a:t>turagagati</a:t>
+            </a:r>
+            <a:pPr algn="l" indent="0" marL="0">
+              <a:lnSpc>
+                <a:spcPts val="1680"/>
+              </a:lnSpc>
+              <a:spcBef>
+                <a:spcPts val="300"/>
+              </a:spcBef>
+              <a:spcAft>
+                <a:spcPts val="300"/>
+              </a:spcAft>
+              <a:buNone/>
+            </a:pPr>
+            <a:r>
+              <a:rPr lang="en-US" sz="1200" dirty="0">
+                <a:solidFill>
+                  <a:srgbClr val="1C2833"/>
+                </a:solidFill>
+                <a:latin typeface="Arial" pitchFamily="34" charset="0"/>
+                <a:ea typeface="Arial" pitchFamily="34" charset="-122"/>
+                <a:cs typeface="Arial" pitchFamily="34" charset="-120"/>
+              </a:rPr>
+              <a:t> method and verify its magic constant of 65.</a:t>
             </a:r>
             <a:endParaRPr lang="en-US" sz="1200" dirty="0"/>
           </a:p>
@@ -3751,7 +5586,7 @@
                 <a:ea typeface="Georgia" pitchFamily="34" charset="-122"/>
                 <a:cs typeface="Georgia" pitchFamily="34" charset="-120"/>
               </a:rPr>
-              <a:t>Vocabulary review</a:t>
+              <a:t>Materials</a:t>
             </a:r>
             <a:endParaRPr lang="en-US" sz="1800" dirty="0"/>
           </a:p>
@@ -3766,7 +5601,7 @@
         <p:spPr>
           <a:xfrm>
             <a:off x="634901" y="883593"/>
-            <a:ext cx="8102798" cy="525661"/>
+            <a:ext cx="8102798" cy="769441"/>
           </a:xfrm>
           <a:prstGeom prst="rect">
             <a:avLst/>
@@ -3789,26 +5624,6 @@
               <a:buChar char="•"/>
             </a:pPr>
             <a:r>
-              <a:rPr lang="en-US" sz="1200" i="1" dirty="0">
-                <a:solidFill>
-                  <a:srgbClr val="1C2833"/>
-                </a:solidFill>
-                <a:latin typeface="Arial" pitchFamily="34" charset="0"/>
-                <a:ea typeface="Arial" pitchFamily="34" charset="-122"/>
-                <a:cs typeface="Arial" pitchFamily="34" charset="-120"/>
-              </a:rPr>
-              <a:t>turagagati</a:t>
-            </a:r>
-            <a:pPr algn="l" indent="0" marL="0">
-              <a:lnSpc>
-                <a:spcPts val="1620"/>
-              </a:lnSpc>
-              <a:spcAft>
-                <a:spcPts val="300"/>
-              </a:spcAft>
-              <a:buNone/>
-            </a:pPr>
-            <a:r>
               <a:rPr lang="en-US" sz="1200" dirty="0">
                 <a:solidFill>
                   <a:srgbClr val="1C2833"/>
@@ -3817,7 +5632,7 @@
                 <a:ea typeface="Arial" pitchFamily="34" charset="-122"/>
                 <a:cs typeface="Arial" pitchFamily="34" charset="-120"/>
               </a:rPr>
-              <a:t> — stair-step method (introduced Day 4).</a:t>
+              <a:t>Printed blank 5×5 grids (3 per student)</a:t>
             </a:r>
             <a:endParaRPr lang="en-US" sz="1200" dirty="0"/>
           </a:p>
@@ -3833,24 +5648,28 @@
               <a:buChar char="•"/>
             </a:pPr>
             <a:r>
-              <a:rPr lang="en-US" sz="1200" i="1" dirty="0">
-                <a:solidFill>
-                  <a:srgbClr val="1C2833"/>
-                </a:solidFill>
-                <a:latin typeface="Arial" pitchFamily="34" charset="0"/>
-                <a:ea typeface="Arial" pitchFamily="34" charset="-122"/>
-                <a:cs typeface="Arial" pitchFamily="34" charset="-120"/>
-              </a:rPr>
-              <a:t>magic constant</a:t>
-            </a:r>
-            <a:pPr algn="l" indent="0" marL="0">
+              <a:rPr lang="en-US" sz="1200" dirty="0">
+                <a:solidFill>
+                  <a:srgbClr val="1C2833"/>
+                </a:solidFill>
+                <a:latin typeface="Arial" pitchFamily="34" charset="0"/>
+                <a:ea typeface="Arial" pitchFamily="34" charset="-122"/>
+                <a:cs typeface="Arial" pitchFamily="34" charset="-120"/>
+              </a:rPr>
+              <a:t>The 5-step rule handout from Day 4</a:t>
+            </a:r>
+            <a:endParaRPr lang="en-US" sz="1200" dirty="0"/>
+          </a:p>
+          <a:p>
+            <a:pPr algn="l" marL="342900" indent="-342900">
               <a:lnSpc>
                 <a:spcPts val="1620"/>
               </a:lnSpc>
               <a:spcAft>
                 <a:spcPts val="300"/>
               </a:spcAft>
-              <a:buNone/>
+              <a:buSzPct val="100000"/>
+              <a:buChar char="•"/>
             </a:pPr>
             <a:r>
               <a:rPr lang="en-US" sz="1200" dirty="0">
@@ -3861,47 +5680,7 @@
                 <a:ea typeface="Arial" pitchFamily="34" charset="-122"/>
                 <a:cs typeface="Arial" pitchFamily="34" charset="-120"/>
               </a:rPr>
-              <a:t> for 5×5 → </a:t>
-            </a:r>
-            <a:pPr algn="l" indent="0" marL="0">
-              <a:lnSpc>
-                <a:spcPts val="1620"/>
-              </a:lnSpc>
-              <a:spcAft>
-                <a:spcPts val="300"/>
-              </a:spcAft>
-              <a:buNone/>
-            </a:pPr>
-            <a:r>
-              <a:rPr lang="en-US" sz="1200" b="1" dirty="0">
-                <a:solidFill>
-                  <a:srgbClr val="1C2833"/>
-                </a:solidFill>
-                <a:latin typeface="Arial" pitchFamily="34" charset="0"/>
-                <a:ea typeface="Arial" pitchFamily="34" charset="-122"/>
-                <a:cs typeface="Arial" pitchFamily="34" charset="-120"/>
-              </a:rPr>
-              <a:t>65</a:t>
-            </a:r>
-            <a:pPr algn="l" indent="0" marL="0">
-              <a:lnSpc>
-                <a:spcPts val="1620"/>
-              </a:lnSpc>
-              <a:spcAft>
-                <a:spcPts val="300"/>
-              </a:spcAft>
-              <a:buNone/>
-            </a:pPr>
-            <a:r>
-              <a:rPr lang="en-US" sz="1200" dirty="0">
-                <a:solidFill>
-                  <a:srgbClr val="1C2833"/>
-                </a:solidFill>
-                <a:latin typeface="Arial" pitchFamily="34" charset="0"/>
-                <a:ea typeface="Arial" pitchFamily="34" charset="-122"/>
-                <a:cs typeface="Arial" pitchFamily="34" charset="-120"/>
-              </a:rPr>
-              <a:t> (from Day 2).</a:t>
+              <a:t>Stopwatch (for timed second-construction)</a:t>
             </a:r>
             <a:endParaRPr lang="en-US" sz="1200" dirty="0"/>
           </a:p>
@@ -4059,7 +5838,7 @@
                 <a:ea typeface="Georgia" pitchFamily="34" charset="-122"/>
                 <a:cs typeface="Georgia" pitchFamily="34" charset="-120"/>
               </a:rPr>
-              <a:t>Lesson flow</a:t>
+              <a:t>Vocabulary review</a:t>
             </a:r>
             <a:endParaRPr lang="en-US" sz="1800" dirty="0"/>
           </a:p>
@@ -4068,6 +5847,156 @@
       <p:sp>
         <p:nvSpPr>
           <p:cNvPr id="4" name="Text 2"/>
+          <p:cNvSpPr/>
+          <p:nvPr/>
+        </p:nvSpPr>
+        <p:spPr>
+          <a:xfrm>
+            <a:off x="634901" y="883593"/>
+            <a:ext cx="8102798" cy="525661"/>
+          </a:xfrm>
+          <a:prstGeom prst="rect">
+            <a:avLst/>
+          </a:prstGeom>
+          <a:noFill/>
+          <a:ln/>
+        </p:spPr>
+        <p:txBody>
+          <a:bodyPr wrap="square" lIns="0" tIns="0" rIns="0" bIns="0" rtlCol="0" anchor="t"/>
+          <a:lstStyle/>
+          <a:p>
+            <a:pPr algn="l" marL="342900" indent="-342900">
+              <a:lnSpc>
+                <a:spcPts val="1620"/>
+              </a:lnSpc>
+              <a:spcAft>
+                <a:spcPts val="300"/>
+              </a:spcAft>
+              <a:buSzPct val="100000"/>
+              <a:buChar char="•"/>
+            </a:pPr>
+            <a:r>
+              <a:rPr lang="en-US" sz="1200" i="1" dirty="0">
+                <a:solidFill>
+                  <a:srgbClr val="1C2833"/>
+                </a:solidFill>
+                <a:latin typeface="Arial" pitchFamily="34" charset="0"/>
+                <a:ea typeface="Arial" pitchFamily="34" charset="-122"/>
+                <a:cs typeface="Arial" pitchFamily="34" charset="-120"/>
+              </a:rPr>
+              <a:t>turagagati</a:t>
+            </a:r>
+            <a:pPr algn="l" indent="0" marL="0">
+              <a:lnSpc>
+                <a:spcPts val="1620"/>
+              </a:lnSpc>
+              <a:spcAft>
+                <a:spcPts val="300"/>
+              </a:spcAft>
+              <a:buNone/>
+            </a:pPr>
+            <a:r>
+              <a:rPr lang="en-US" sz="1200" dirty="0">
+                <a:solidFill>
+                  <a:srgbClr val="1C2833"/>
+                </a:solidFill>
+                <a:latin typeface="Arial" pitchFamily="34" charset="0"/>
+                <a:ea typeface="Arial" pitchFamily="34" charset="-122"/>
+                <a:cs typeface="Arial" pitchFamily="34" charset="-120"/>
+              </a:rPr>
+              <a:t> — stair-step method (introduced Day 4).</a:t>
+            </a:r>
+            <a:endParaRPr lang="en-US" sz="1200" dirty="0"/>
+          </a:p>
+          <a:p>
+            <a:pPr algn="l" marL="342900" indent="-342900">
+              <a:lnSpc>
+                <a:spcPts val="1620"/>
+              </a:lnSpc>
+              <a:spcAft>
+                <a:spcPts val="300"/>
+              </a:spcAft>
+              <a:buSzPct val="100000"/>
+              <a:buChar char="•"/>
+            </a:pPr>
+            <a:r>
+              <a:rPr lang="en-US" sz="1200" i="1" dirty="0">
+                <a:solidFill>
+                  <a:srgbClr val="1C2833"/>
+                </a:solidFill>
+                <a:latin typeface="Arial" pitchFamily="34" charset="0"/>
+                <a:ea typeface="Arial" pitchFamily="34" charset="-122"/>
+                <a:cs typeface="Arial" pitchFamily="34" charset="-120"/>
+              </a:rPr>
+              <a:t>magic constant</a:t>
+            </a:r>
+            <a:pPr algn="l" indent="0" marL="0">
+              <a:lnSpc>
+                <a:spcPts val="1620"/>
+              </a:lnSpc>
+              <a:spcAft>
+                <a:spcPts val="300"/>
+              </a:spcAft>
+              <a:buNone/>
+            </a:pPr>
+            <a:r>
+              <a:rPr lang="en-US" sz="1200" dirty="0">
+                <a:solidFill>
+                  <a:srgbClr val="1C2833"/>
+                </a:solidFill>
+                <a:latin typeface="Arial" pitchFamily="34" charset="0"/>
+                <a:ea typeface="Arial" pitchFamily="34" charset="-122"/>
+                <a:cs typeface="Arial" pitchFamily="34" charset="-120"/>
+              </a:rPr>
+              <a:t> for 5×5 → </a:t>
+            </a:r>
+            <a:pPr algn="l" indent="0" marL="0">
+              <a:lnSpc>
+                <a:spcPts val="1620"/>
+              </a:lnSpc>
+              <a:spcAft>
+                <a:spcPts val="300"/>
+              </a:spcAft>
+              <a:buNone/>
+            </a:pPr>
+            <a:r>
+              <a:rPr lang="en-US" sz="1200" b="1" dirty="0">
+                <a:solidFill>
+                  <a:srgbClr val="1C2833"/>
+                </a:solidFill>
+                <a:latin typeface="Arial" pitchFamily="34" charset="0"/>
+                <a:ea typeface="Arial" pitchFamily="34" charset="-122"/>
+                <a:cs typeface="Arial" pitchFamily="34" charset="-120"/>
+              </a:rPr>
+              <a:t>65</a:t>
+            </a:r>
+            <a:pPr algn="l" indent="0" marL="0">
+              <a:lnSpc>
+                <a:spcPts val="1620"/>
+              </a:lnSpc>
+              <a:spcAft>
+                <a:spcPts val="300"/>
+              </a:spcAft>
+              <a:buNone/>
+            </a:pPr>
+            <a:r>
+              <a:rPr lang="en-US" sz="1200" dirty="0">
+                <a:solidFill>
+                  <a:srgbClr val="1C2833"/>
+                </a:solidFill>
+                <a:latin typeface="Arial" pitchFamily="34" charset="0"/>
+                <a:ea typeface="Arial" pitchFamily="34" charset="-122"/>
+                <a:cs typeface="Arial" pitchFamily="34" charset="-120"/>
+              </a:rPr>
+              <a:t> (from Day 2).</a:t>
+            </a:r>
+            <a:endParaRPr lang="en-US" sz="1200" dirty="0"/>
+          </a:p>
+        </p:txBody>
+      </p:sp>
+      <p:sp>
+        <p:nvSpPr>
+          <p:cNvPr id="5" name="Text 3"/>
           <p:cNvSpPr/>
           <p:nvPr/>
         </p:nvSpPr>
@@ -4217,7 +6146,7 @@
                 <a:ea typeface="Georgia" pitchFamily="34" charset="-122"/>
                 <a:cs typeface="Georgia" pitchFamily="34" charset="-120"/>
               </a:rPr>
-              <a:t>Warm-up (5 min)</a:t>
+              <a:t>Lesson flow</a:t>
             </a:r>
             <a:endParaRPr lang="en-US" sz="1800" dirty="0"/>
           </a:p>
@@ -4226,146 +6155,6 @@
       <p:sp>
         <p:nvSpPr>
           <p:cNvPr id="4" name="Text 2"/>
-          <p:cNvSpPr/>
-          <p:nvPr/>
-        </p:nvSpPr>
-        <p:spPr>
-          <a:xfrm>
-            <a:off x="406301" y="870942"/>
-            <a:ext cx="8498026" cy="426541"/>
-          </a:xfrm>
-          <a:prstGeom prst="rect">
-            <a:avLst/>
-          </a:prstGeom>
-          <a:noFill/>
-          <a:ln/>
-        </p:spPr>
-        <p:txBody>
-          <a:bodyPr wrap="square" lIns="0" tIns="0" rIns="0" bIns="0" rtlCol="0" anchor="t"/>
-          <a:lstStyle/>
-          <a:p>
-            <a:pPr algn="l" indent="0" marL="0">
-              <a:lnSpc>
-                <a:spcPts val="1680"/>
-              </a:lnSpc>
-              <a:spcBef>
-                <a:spcPts val="300"/>
-              </a:spcBef>
-              <a:spcAft>
-                <a:spcPts val="300"/>
-              </a:spcAft>
-              <a:buNone/>
-            </a:pPr>
-            <a:r>
-              <a:rPr lang="en-US" sz="1200" dirty="0">
-                <a:solidFill>
-                  <a:srgbClr val="1C2833"/>
-                </a:solidFill>
-                <a:latin typeface="Arial" pitchFamily="34" charset="0"/>
-                <a:ea typeface="Arial" pitchFamily="34" charset="-122"/>
-                <a:cs typeface="Arial" pitchFamily="34" charset="-120"/>
-              </a:rPr>
-              <a:t>– Class recall: 5-step rule, recited together. – Magic-constant check: </a:t>
-            </a:r>
-            <a:pPr algn="l" indent="0" marL="0">
-              <a:lnSpc>
-                <a:spcPts val="1680"/>
-              </a:lnSpc>
-              <a:spcBef>
-                <a:spcPts val="300"/>
-              </a:spcBef>
-              <a:spcAft>
-                <a:spcPts val="300"/>
-              </a:spcAft>
-              <a:buNone/>
-            </a:pPr>
-            <a:r>
-              <a:rPr lang="en-US" sz="1200" i="1" dirty="0">
-                <a:solidFill>
-                  <a:srgbClr val="1C2833"/>
-                </a:solidFill>
-                <a:latin typeface="Arial" pitchFamily="34" charset="0"/>
-                <a:ea typeface="Arial" pitchFamily="34" charset="-122"/>
-                <a:cs typeface="Arial" pitchFamily="34" charset="-120"/>
-              </a:rPr>
-              <a:t>"For a 5×5 with numbers 1–25, the magic constant is ____?"</a:t>
-            </a:r>
-            <a:pPr algn="l" indent="0" marL="0">
-              <a:lnSpc>
-                <a:spcPts val="1680"/>
-              </a:lnSpc>
-              <a:spcBef>
-                <a:spcPts val="300"/>
-              </a:spcBef>
-              <a:spcAft>
-                <a:spcPts val="300"/>
-              </a:spcAft>
-              <a:buNone/>
-            </a:pPr>
-            <a:r>
-              <a:rPr lang="en-US" sz="1200" dirty="0">
-                <a:solidFill>
-                  <a:srgbClr val="1C2833"/>
-                </a:solidFill>
-                <a:latin typeface="Arial" pitchFamily="34" charset="0"/>
-                <a:ea typeface="Arial" pitchFamily="34" charset="-122"/>
-                <a:cs typeface="Arial" pitchFamily="34" charset="-120"/>
-              </a:rPr>
-              <a:t> (65.) – Pre-class question: did everyone produce the </a:t>
-            </a:r>
-            <a:pPr algn="l" indent="0" marL="0">
-              <a:lnSpc>
-                <a:spcPts val="1680"/>
-              </a:lnSpc>
-              <a:spcBef>
-                <a:spcPts val="300"/>
-              </a:spcBef>
-              <a:spcAft>
-                <a:spcPts val="300"/>
-              </a:spcAft>
-              <a:buNone/>
-            </a:pPr>
-            <a:r>
-              <a:rPr lang="en-US" sz="1200" i="1" dirty="0">
-                <a:solidFill>
-                  <a:srgbClr val="1C2833"/>
-                </a:solidFill>
-                <a:latin typeface="Arial" pitchFamily="34" charset="0"/>
-                <a:ea typeface="Arial" pitchFamily="34" charset="-122"/>
-                <a:cs typeface="Arial" pitchFamily="34" charset="-120"/>
-              </a:rPr>
-              <a:t>same</a:t>
-            </a:r>
-            <a:pPr algn="l" indent="0" marL="0">
-              <a:lnSpc>
-                <a:spcPts val="1680"/>
-              </a:lnSpc>
-              <a:spcBef>
-                <a:spcPts val="300"/>
-              </a:spcBef>
-              <a:spcAft>
-                <a:spcPts val="300"/>
-              </a:spcAft>
-              <a:buNone/>
-            </a:pPr>
-            <a:r>
-              <a:rPr lang="en-US" sz="1200" dirty="0">
-                <a:solidFill>
-                  <a:srgbClr val="1C2833"/>
-                </a:solidFill>
-                <a:latin typeface="Arial" pitchFamily="34" charset="0"/>
-                <a:ea typeface="Arial" pitchFamily="34" charset="-122"/>
-                <a:cs typeface="Arial" pitchFamily="34" charset="-120"/>
-              </a:rPr>
-              <a:t> 5×5 last night? Most will say yes.</a:t>
-            </a:r>
-            <a:endParaRPr lang="en-US" sz="1200" dirty="0"/>
-          </a:p>
-        </p:txBody>
-      </p:sp>
-      <p:sp>
-        <p:nvSpPr>
-          <p:cNvPr id="5" name="Text 3"/>
           <p:cNvSpPr/>
           <p:nvPr/>
         </p:nvSpPr>
@@ -4515,7 +6304,7 @@
                 <a:ea typeface="Georgia" pitchFamily="34" charset="-122"/>
                 <a:cs typeface="Georgia" pitchFamily="34" charset="-120"/>
               </a:rPr>
-              <a:t>Core (20 min)</a:t>
+              <a:t>Warm-up (5 min)</a:t>
             </a:r>
             <a:endParaRPr lang="en-US" sz="1800" dirty="0"/>
           </a:p>
@@ -4530,7 +6319,7 @@
         <p:spPr>
           <a:xfrm>
             <a:off x="634901" y="883593"/>
-            <a:ext cx="8102798" cy="281880"/>
+            <a:ext cx="8102798" cy="769441"/>
           </a:xfrm>
           <a:prstGeom prst="rect">
             <a:avLst/>
@@ -4553,26 +6342,6 @@
               <a:buChar char="•"/>
             </a:pPr>
             <a:r>
-              <a:rPr lang="en-US" sz="1200" b="1" dirty="0">
-                <a:solidFill>
-                  <a:srgbClr val="1C2833"/>
-                </a:solidFill>
-                <a:latin typeface="Arial" pitchFamily="34" charset="0"/>
-                <a:ea typeface="Arial" pitchFamily="34" charset="-122"/>
-                <a:cs typeface="Arial" pitchFamily="34" charset="-120"/>
-              </a:rPr>
-              <a:t>Build a 5×5 together on the board.</a:t>
-            </a:r>
-            <a:pPr algn="l" indent="0" marL="0">
-              <a:lnSpc>
-                <a:spcPts val="1620"/>
-              </a:lnSpc>
-              <a:spcAft>
-                <a:spcPts val="300"/>
-              </a:spcAft>
-              <a:buNone/>
-            </a:pPr>
-            <a:r>
               <a:rPr lang="en-US" sz="1200" dirty="0">
                 <a:solidFill>
                   <a:srgbClr val="1C2833"/>
@@ -4581,559 +6350,10 @@
                 <a:ea typeface="Arial" pitchFamily="34" charset="-122"/>
                 <a:cs typeface="Arial" pitchFamily="34" charset="-120"/>
               </a:rPr>
-              <a:t> Narrate every step. Take 8–10 minutes — go cell-by-cell.</a:t>
+              <a:t>Class recall: 5-step rule, recited together.</a:t>
             </a:r>
             <a:endParaRPr lang="en-US" sz="1200" dirty="0"/>
           </a:p>
-        </p:txBody>
-      </p:sp>
-      <p:sp>
-        <p:nvSpPr>
-          <p:cNvPr id="5" name="Text 3"/>
-          <p:cNvSpPr/>
-          <p:nvPr/>
-        </p:nvSpPr>
-        <p:spPr>
-          <a:xfrm>
-            <a:off x="406301" y="1254323"/>
-            <a:ext cx="8498026" cy="426541"/>
-          </a:xfrm>
-          <a:prstGeom prst="rect">
-            <a:avLst/>
-          </a:prstGeom>
-          <a:noFill/>
-          <a:ln/>
-        </p:spPr>
-        <p:txBody>
-          <a:bodyPr wrap="square" lIns="0" tIns="0" rIns="0" bIns="0" rtlCol="0" anchor="t"/>
-          <a:lstStyle/>
-          <a:p>
-            <a:pPr algn="l" indent="0" marL="0">
-              <a:lnSpc>
-                <a:spcPts val="1680"/>
-              </a:lnSpc>
-              <a:spcBef>
-                <a:spcPts val="300"/>
-              </a:spcBef>
-              <a:spcAft>
-                <a:spcPts val="300"/>
-              </a:spcAft>
-              <a:buNone/>
-            </a:pPr>
-            <a:r>
-              <a:rPr lang="en-US" sz="1200" dirty="0">
-                <a:solidFill>
-                  <a:srgbClr val="1C2833"/>
-                </a:solidFill>
-                <a:latin typeface="Arial" pitchFamily="34" charset="0"/>
-                <a:ea typeface="Arial" pitchFamily="34" charset="-122"/>
-                <a:cs typeface="Arial" pitchFamily="34" charset="-120"/>
-              </a:rPr>
-              <a:t>Start with 1 in row-1, column-3 (the top middle). Place 2 up-right (off the top → wraps to bottom row, column 4). Place 3 up-right from 2 (off the right → wraps to row 4, column 5)... continue.</a:t>
-            </a:r>
-            <a:endParaRPr lang="en-US" sz="1200" dirty="0"/>
-          </a:p>
-        </p:txBody>
-      </p:sp>
-      <p:sp>
-        <p:nvSpPr>
-          <p:cNvPr id="6" name="Text 4"/>
-          <p:cNvSpPr/>
-          <p:nvPr/>
-        </p:nvSpPr>
-        <p:spPr>
-          <a:xfrm>
-            <a:off x="406301" y="1757065"/>
-            <a:ext cx="8498026" cy="213271"/>
-          </a:xfrm>
-          <a:prstGeom prst="rect">
-            <a:avLst/>
-          </a:prstGeom>
-          <a:noFill/>
-          <a:ln/>
-        </p:spPr>
-        <p:txBody>
-          <a:bodyPr wrap="square" lIns="0" tIns="0" rIns="0" bIns="0" rtlCol="0" anchor="t"/>
-          <a:lstStyle/>
-          <a:p>
-            <a:pPr algn="l" indent="0" marL="0">
-              <a:lnSpc>
-                <a:spcPts val="1680"/>
-              </a:lnSpc>
-              <a:spcBef>
-                <a:spcPts val="300"/>
-              </a:spcBef>
-              <a:spcAft>
-                <a:spcPts val="300"/>
-              </a:spcAft>
-              <a:buNone/>
-            </a:pPr>
-            <a:r>
-              <a:rPr lang="en-US" sz="1200" dirty="0">
-                <a:solidFill>
-                  <a:srgbClr val="1C2833"/>
-                </a:solidFill>
-                <a:latin typeface="Arial" pitchFamily="34" charset="0"/>
-                <a:ea typeface="Arial" pitchFamily="34" charset="-122"/>
-                <a:cs typeface="Arial" pitchFamily="34" charset="-120"/>
-              </a:rPr>
-              <a:t>Expected result (the classical Nārāyaṇa 5×5):</a:t>
-            </a:r>
-            <a:endParaRPr lang="en-US" sz="1200" dirty="0"/>
-          </a:p>
-        </p:txBody>
-      </p:sp>
-      <p:sp>
-        <p:nvSpPr>
-          <p:cNvPr id="7" name="Text 5"/>
-          <p:cNvSpPr/>
-          <p:nvPr/>
-        </p:nvSpPr>
-        <p:spPr>
-          <a:xfrm>
-            <a:off x="406301" y="2059186"/>
-            <a:ext cx="8331398" cy="1825079"/>
-          </a:xfrm>
-          <a:prstGeom prst="rect">
-            <a:avLst/>
-          </a:prstGeom>
-          <a:solidFill>
-            <a:srgbClr val="F4F8F9"/>
-          </a:solidFill>
-          <a:ln/>
-        </p:spPr>
-        <p:txBody>
-          <a:bodyPr wrap="square" rtlCol="0" anchor="ctr"/>
-          <a:lstStyle/>
-          <a:p>
-            <a:pPr indent="0" marL="0">
-              <a:buNone/>
-            </a:pPr>
-            <a:endParaRPr lang="en-US" dirty="0"/>
-          </a:p>
-        </p:txBody>
-      </p:sp>
-      <p:sp>
-        <p:nvSpPr>
-          <p:cNvPr id="8" name="Shape 6"/>
-          <p:cNvSpPr/>
-          <p:nvPr/>
-        </p:nvSpPr>
-        <p:spPr>
-          <a:xfrm>
-            <a:off x="430113" y="2059186"/>
-            <a:ext cx="0" cy="1825079"/>
-          </a:xfrm>
-          <a:prstGeom prst="line">
-            <a:avLst/>
-          </a:prstGeom>
-          <a:noFill/>
-          <a:ln w="47625">
-            <a:solidFill>
-              <a:srgbClr val="277884"/>
-            </a:solidFill>
-            <a:prstDash val="solid"/>
-          </a:ln>
-        </p:spPr>
-      </p:sp>
-      <p:sp>
-        <p:nvSpPr>
-          <p:cNvPr id="9" name="Text 7"/>
-          <p:cNvSpPr/>
-          <p:nvPr/>
-        </p:nvSpPr>
-        <p:spPr>
-          <a:xfrm>
-            <a:off x="631627" y="2186136"/>
-            <a:ext cx="8086939" cy="174575"/>
-          </a:xfrm>
-          <a:prstGeom prst="rect">
-            <a:avLst/>
-          </a:prstGeom>
-          <a:noFill/>
-          <a:ln/>
-        </p:spPr>
-        <p:txBody>
-          <a:bodyPr wrap="square" lIns="0" tIns="0" rIns="0" bIns="0" rtlCol="0" anchor="t"/>
-          <a:lstStyle/>
-          <a:p>
-            <a:pPr algn="l" indent="0" marL="0">
-              <a:lnSpc>
-                <a:spcPts val="1375"/>
-              </a:lnSpc>
-              <a:buNone/>
-            </a:pPr>
-            <a:r>
-              <a:rPr lang="en-US" sz="1100" dirty="0">
-                <a:solidFill>
-                  <a:srgbClr val="1C2833"/>
-                </a:solidFill>
-                <a:latin typeface="Courier New" pitchFamily="34" charset="0"/>
-                <a:ea typeface="Courier New" pitchFamily="34" charset="-122"/>
-                <a:cs typeface="Courier New" pitchFamily="34" charset="-120"/>
-              </a:rPr>
-              <a:t>17 | 24 |  1 |  8 | 15</a:t>
-            </a:r>
-            <a:endParaRPr lang="en-US" sz="1100" dirty="0"/>
-          </a:p>
-        </p:txBody>
-      </p:sp>
-      <p:sp>
-        <p:nvSpPr>
-          <p:cNvPr id="10" name="Text 8"/>
-          <p:cNvSpPr/>
-          <p:nvPr/>
-        </p:nvSpPr>
-        <p:spPr>
-          <a:xfrm>
-            <a:off x="631627" y="2360712"/>
-            <a:ext cx="8086939" cy="174575"/>
-          </a:xfrm>
-          <a:prstGeom prst="rect">
-            <a:avLst/>
-          </a:prstGeom>
-          <a:noFill/>
-          <a:ln/>
-        </p:spPr>
-        <p:txBody>
-          <a:bodyPr wrap="square" lIns="0" tIns="0" rIns="0" bIns="0" rtlCol="0" anchor="t"/>
-          <a:lstStyle/>
-          <a:p>
-            <a:pPr algn="l" indent="0" marL="0">
-              <a:lnSpc>
-                <a:spcPts val="1375"/>
-              </a:lnSpc>
-              <a:buNone/>
-            </a:pPr>
-            <a:r>
-              <a:rPr lang="en-US" sz="1100" dirty="0">
-                <a:solidFill>
-                  <a:srgbClr val="1C2833"/>
-                </a:solidFill>
-                <a:latin typeface="Courier New" pitchFamily="34" charset="0"/>
-                <a:ea typeface="Courier New" pitchFamily="34" charset="-122"/>
-                <a:cs typeface="Courier New" pitchFamily="34" charset="-120"/>
-              </a:rPr>
-              <a:t>----------------------</a:t>
-            </a:r>
-            <a:endParaRPr lang="en-US" sz="1100" dirty="0"/>
-          </a:p>
-        </p:txBody>
-      </p:sp>
-      <p:sp>
-        <p:nvSpPr>
-          <p:cNvPr id="11" name="Text 9"/>
-          <p:cNvSpPr/>
-          <p:nvPr/>
-        </p:nvSpPr>
-        <p:spPr>
-          <a:xfrm>
-            <a:off x="631627" y="2535287"/>
-            <a:ext cx="8086939" cy="174575"/>
-          </a:xfrm>
-          <a:prstGeom prst="rect">
-            <a:avLst/>
-          </a:prstGeom>
-          <a:noFill/>
-          <a:ln/>
-        </p:spPr>
-        <p:txBody>
-          <a:bodyPr wrap="square" lIns="0" tIns="0" rIns="0" bIns="0" rtlCol="0" anchor="t"/>
-          <a:lstStyle/>
-          <a:p>
-            <a:pPr algn="l" indent="0" marL="0">
-              <a:lnSpc>
-                <a:spcPts val="1375"/>
-              </a:lnSpc>
-              <a:buNone/>
-            </a:pPr>
-            <a:r>
-              <a:rPr lang="en-US" sz="1100" dirty="0">
-                <a:solidFill>
-                  <a:srgbClr val="1C2833"/>
-                </a:solidFill>
-                <a:latin typeface="Courier New" pitchFamily="34" charset="0"/>
-                <a:ea typeface="Courier New" pitchFamily="34" charset="-122"/>
-                <a:cs typeface="Courier New" pitchFamily="34" charset="-120"/>
-              </a:rPr>
-              <a:t>23 |  5 |  7 | 14 | 16</a:t>
-            </a:r>
-            <a:endParaRPr lang="en-US" sz="1100" dirty="0"/>
-          </a:p>
-        </p:txBody>
-      </p:sp>
-      <p:sp>
-        <p:nvSpPr>
-          <p:cNvPr id="12" name="Text 10"/>
-          <p:cNvSpPr/>
-          <p:nvPr/>
-        </p:nvSpPr>
-        <p:spPr>
-          <a:xfrm>
-            <a:off x="631627" y="2709863"/>
-            <a:ext cx="8086939" cy="174575"/>
-          </a:xfrm>
-          <a:prstGeom prst="rect">
-            <a:avLst/>
-          </a:prstGeom>
-          <a:noFill/>
-          <a:ln/>
-        </p:spPr>
-        <p:txBody>
-          <a:bodyPr wrap="square" lIns="0" tIns="0" rIns="0" bIns="0" rtlCol="0" anchor="t"/>
-          <a:lstStyle/>
-          <a:p>
-            <a:pPr algn="l" indent="0" marL="0">
-              <a:lnSpc>
-                <a:spcPts val="1375"/>
-              </a:lnSpc>
-              <a:buNone/>
-            </a:pPr>
-            <a:r>
-              <a:rPr lang="en-US" sz="1100" dirty="0">
-                <a:solidFill>
-                  <a:srgbClr val="1C2833"/>
-                </a:solidFill>
-                <a:latin typeface="Courier New" pitchFamily="34" charset="0"/>
-                <a:ea typeface="Courier New" pitchFamily="34" charset="-122"/>
-                <a:cs typeface="Courier New" pitchFamily="34" charset="-120"/>
-              </a:rPr>
-              <a:t>----------------------</a:t>
-            </a:r>
-            <a:endParaRPr lang="en-US" sz="1100" dirty="0"/>
-          </a:p>
-        </p:txBody>
-      </p:sp>
-      <p:sp>
-        <p:nvSpPr>
-          <p:cNvPr id="13" name="Text 11"/>
-          <p:cNvSpPr/>
-          <p:nvPr/>
-        </p:nvSpPr>
-        <p:spPr>
-          <a:xfrm>
-            <a:off x="631627" y="2884438"/>
-            <a:ext cx="8086939" cy="174575"/>
-          </a:xfrm>
-          <a:prstGeom prst="rect">
-            <a:avLst/>
-          </a:prstGeom>
-          <a:noFill/>
-          <a:ln/>
-        </p:spPr>
-        <p:txBody>
-          <a:bodyPr wrap="square" lIns="0" tIns="0" rIns="0" bIns="0" rtlCol="0" anchor="t"/>
-          <a:lstStyle/>
-          <a:p>
-            <a:pPr algn="l" indent="0" marL="0">
-              <a:lnSpc>
-                <a:spcPts val="1375"/>
-              </a:lnSpc>
-              <a:buNone/>
-            </a:pPr>
-            <a:r>
-              <a:rPr lang="en-US" sz="1100" dirty="0">
-                <a:solidFill>
-                  <a:srgbClr val="1C2833"/>
-                </a:solidFill>
-                <a:latin typeface="Courier New" pitchFamily="34" charset="0"/>
-                <a:ea typeface="Courier New" pitchFamily="34" charset="-122"/>
-                <a:cs typeface="Courier New" pitchFamily="34" charset="-120"/>
-              </a:rPr>
-              <a:t>4 |  6 | 13 | 20 | 22</a:t>
-            </a:r>
-            <a:endParaRPr lang="en-US" sz="1100" dirty="0"/>
-          </a:p>
-        </p:txBody>
-      </p:sp>
-      <p:sp>
-        <p:nvSpPr>
-          <p:cNvPr id="14" name="Text 12"/>
-          <p:cNvSpPr/>
-          <p:nvPr/>
-        </p:nvSpPr>
-        <p:spPr>
-          <a:xfrm>
-            <a:off x="631627" y="3059013"/>
-            <a:ext cx="8086939" cy="174575"/>
-          </a:xfrm>
-          <a:prstGeom prst="rect">
-            <a:avLst/>
-          </a:prstGeom>
-          <a:noFill/>
-          <a:ln/>
-        </p:spPr>
-        <p:txBody>
-          <a:bodyPr wrap="square" lIns="0" tIns="0" rIns="0" bIns="0" rtlCol="0" anchor="t"/>
-          <a:lstStyle/>
-          <a:p>
-            <a:pPr algn="l" indent="0" marL="0">
-              <a:lnSpc>
-                <a:spcPts val="1375"/>
-              </a:lnSpc>
-              <a:buNone/>
-            </a:pPr>
-            <a:r>
-              <a:rPr lang="en-US" sz="1100" dirty="0">
-                <a:solidFill>
-                  <a:srgbClr val="1C2833"/>
-                </a:solidFill>
-                <a:latin typeface="Courier New" pitchFamily="34" charset="0"/>
-                <a:ea typeface="Courier New" pitchFamily="34" charset="-122"/>
-                <a:cs typeface="Courier New" pitchFamily="34" charset="-120"/>
-              </a:rPr>
-              <a:t>----------------------</a:t>
-            </a:r>
-            <a:endParaRPr lang="en-US" sz="1100" dirty="0"/>
-          </a:p>
-        </p:txBody>
-      </p:sp>
-      <p:sp>
-        <p:nvSpPr>
-          <p:cNvPr id="15" name="Text 13"/>
-          <p:cNvSpPr/>
-          <p:nvPr/>
-        </p:nvSpPr>
-        <p:spPr>
-          <a:xfrm>
-            <a:off x="631627" y="3233589"/>
-            <a:ext cx="8086939" cy="174575"/>
-          </a:xfrm>
-          <a:prstGeom prst="rect">
-            <a:avLst/>
-          </a:prstGeom>
-          <a:noFill/>
-          <a:ln/>
-        </p:spPr>
-        <p:txBody>
-          <a:bodyPr wrap="square" lIns="0" tIns="0" rIns="0" bIns="0" rtlCol="0" anchor="t"/>
-          <a:lstStyle/>
-          <a:p>
-            <a:pPr algn="l" indent="0" marL="0">
-              <a:lnSpc>
-                <a:spcPts val="1375"/>
-              </a:lnSpc>
-              <a:buNone/>
-            </a:pPr>
-            <a:r>
-              <a:rPr lang="en-US" sz="1100" dirty="0">
-                <a:solidFill>
-                  <a:srgbClr val="1C2833"/>
-                </a:solidFill>
-                <a:latin typeface="Courier New" pitchFamily="34" charset="0"/>
-                <a:ea typeface="Courier New" pitchFamily="34" charset="-122"/>
-                <a:cs typeface="Courier New" pitchFamily="34" charset="-120"/>
-              </a:rPr>
-              <a:t>10 | 12 | 19 | 21 |  3</a:t>
-            </a:r>
-            <a:endParaRPr lang="en-US" sz="1100" dirty="0"/>
-          </a:p>
-        </p:txBody>
-      </p:sp>
-      <p:sp>
-        <p:nvSpPr>
-          <p:cNvPr id="16" name="Text 14"/>
-          <p:cNvSpPr/>
-          <p:nvPr/>
-        </p:nvSpPr>
-        <p:spPr>
-          <a:xfrm>
-            <a:off x="631627" y="3408164"/>
-            <a:ext cx="8086939" cy="174575"/>
-          </a:xfrm>
-          <a:prstGeom prst="rect">
-            <a:avLst/>
-          </a:prstGeom>
-          <a:noFill/>
-          <a:ln/>
-        </p:spPr>
-        <p:txBody>
-          <a:bodyPr wrap="square" lIns="0" tIns="0" rIns="0" bIns="0" rtlCol="0" anchor="t"/>
-          <a:lstStyle/>
-          <a:p>
-            <a:pPr algn="l" indent="0" marL="0">
-              <a:lnSpc>
-                <a:spcPts val="1375"/>
-              </a:lnSpc>
-              <a:buNone/>
-            </a:pPr>
-            <a:r>
-              <a:rPr lang="en-US" sz="1100" dirty="0">
-                <a:solidFill>
-                  <a:srgbClr val="1C2833"/>
-                </a:solidFill>
-                <a:latin typeface="Courier New" pitchFamily="34" charset="0"/>
-                <a:ea typeface="Courier New" pitchFamily="34" charset="-122"/>
-                <a:cs typeface="Courier New" pitchFamily="34" charset="-120"/>
-              </a:rPr>
-              <a:t>----------------------</a:t>
-            </a:r>
-            <a:endParaRPr lang="en-US" sz="1100" dirty="0"/>
-          </a:p>
-        </p:txBody>
-      </p:sp>
-      <p:sp>
-        <p:nvSpPr>
-          <p:cNvPr id="17" name="Text 15"/>
-          <p:cNvSpPr/>
-          <p:nvPr/>
-        </p:nvSpPr>
-        <p:spPr>
-          <a:xfrm>
-            <a:off x="631627" y="3582739"/>
-            <a:ext cx="8086939" cy="174575"/>
-          </a:xfrm>
-          <a:prstGeom prst="rect">
-            <a:avLst/>
-          </a:prstGeom>
-          <a:noFill/>
-          <a:ln/>
-        </p:spPr>
-        <p:txBody>
-          <a:bodyPr wrap="square" lIns="0" tIns="0" rIns="0" bIns="0" rtlCol="0" anchor="t"/>
-          <a:lstStyle/>
-          <a:p>
-            <a:pPr algn="l" indent="0" marL="0">
-              <a:lnSpc>
-                <a:spcPts val="1375"/>
-              </a:lnSpc>
-              <a:buNone/>
-            </a:pPr>
-            <a:r>
-              <a:rPr lang="en-US" sz="1100" dirty="0">
-                <a:solidFill>
-                  <a:srgbClr val="1C2833"/>
-                </a:solidFill>
-                <a:latin typeface="Courier New" pitchFamily="34" charset="0"/>
-                <a:ea typeface="Courier New" pitchFamily="34" charset="-122"/>
-                <a:cs typeface="Courier New" pitchFamily="34" charset="-120"/>
-              </a:rPr>
-              <a:t>11 | 18 | 25 |  2 |  9</a:t>
-            </a:r>
-            <a:endParaRPr lang="en-US" sz="1100" dirty="0"/>
-          </a:p>
-        </p:txBody>
-      </p:sp>
-      <p:sp>
-        <p:nvSpPr>
-          <p:cNvPr id="18" name="Text 16"/>
-          <p:cNvSpPr/>
-          <p:nvPr/>
-        </p:nvSpPr>
-        <p:spPr>
-          <a:xfrm>
-            <a:off x="634901" y="3985766"/>
-            <a:ext cx="8102798" cy="281880"/>
-          </a:xfrm>
-          <a:prstGeom prst="rect">
-            <a:avLst/>
-          </a:prstGeom>
-          <a:noFill/>
-          <a:ln/>
-        </p:spPr>
-        <p:txBody>
-          <a:bodyPr wrap="square" lIns="0" tIns="0" rIns="0" bIns="0" rtlCol="0" anchor="t"/>
-          <a:lstStyle/>
           <a:p>
             <a:pPr algn="l" marL="342900" indent="-342900">
               <a:lnSpc>
@@ -5146,15 +6366,15 @@
               <a:buChar char="•"/>
             </a:pPr>
             <a:r>
-              <a:rPr lang="en-US" sz="1200" b="1" dirty="0">
-                <a:solidFill>
-                  <a:srgbClr val="1C2833"/>
-                </a:solidFill>
-                <a:latin typeface="Arial" pitchFamily="34" charset="0"/>
-                <a:ea typeface="Arial" pitchFamily="34" charset="-122"/>
-                <a:cs typeface="Arial" pitchFamily="34" charset="-120"/>
-              </a:rPr>
-              <a:t>Verify together.</a:t>
+              <a:rPr lang="en-US" sz="1200" dirty="0">
+                <a:solidFill>
+                  <a:srgbClr val="1C2833"/>
+                </a:solidFill>
+                <a:latin typeface="Arial" pitchFamily="34" charset="0"/>
+                <a:ea typeface="Arial" pitchFamily="34" charset="-122"/>
+                <a:cs typeface="Arial" pitchFamily="34" charset="-120"/>
+              </a:rPr>
+              <a:t>Magic-constant check: </a:t>
             </a:r>
             <a:pPr algn="l" indent="0" marL="0">
               <a:lnSpc>
@@ -5166,6 +6386,26 @@
               <a:buNone/>
             </a:pPr>
             <a:r>
+              <a:rPr lang="en-US" sz="1200" i="1" dirty="0">
+                <a:solidFill>
+                  <a:srgbClr val="1C2833"/>
+                </a:solidFill>
+                <a:latin typeface="Arial" pitchFamily="34" charset="0"/>
+                <a:ea typeface="Arial" pitchFamily="34" charset="-122"/>
+                <a:cs typeface="Arial" pitchFamily="34" charset="-120"/>
+              </a:rPr>
+              <a:t>"For a 5×5 with numbers 1–25, the magic constant is ____?"</a:t>
+            </a:r>
+            <a:pPr algn="l" indent="0" marL="0">
+              <a:lnSpc>
+                <a:spcPts val="1620"/>
+              </a:lnSpc>
+              <a:spcAft>
+                <a:spcPts val="300"/>
+              </a:spcAft>
+              <a:buNone/>
+            </a:pPr>
+            <a:r>
               <a:rPr lang="en-US" sz="1200" dirty="0">
                 <a:solidFill>
                   <a:srgbClr val="1C2833"/>
@@ -5174,80 +6414,10 @@
                 <a:ea typeface="Arial" pitchFamily="34" charset="-122"/>
                 <a:cs typeface="Arial" pitchFamily="34" charset="-120"/>
               </a:rPr>
-              <a:t> Pick:</a:t>
+              <a:t> (65.)</a:t>
             </a:r>
             <a:endParaRPr lang="en-US" sz="1200" dirty="0"/>
           </a:p>
-        </p:txBody>
-      </p:sp>
-      <p:sp>
-        <p:nvSpPr>
-          <p:cNvPr id="19" name="Text 17"/>
-          <p:cNvSpPr/>
-          <p:nvPr/>
-        </p:nvSpPr>
-        <p:spPr>
-          <a:xfrm>
-            <a:off x="406301" y="4356497"/>
-            <a:ext cx="8498026" cy="426541"/>
-          </a:xfrm>
-          <a:prstGeom prst="rect">
-            <a:avLst/>
-          </a:prstGeom>
-          <a:noFill/>
-          <a:ln/>
-        </p:spPr>
-        <p:txBody>
-          <a:bodyPr wrap="square" lIns="0" tIns="0" rIns="0" bIns="0" rtlCol="0" anchor="t"/>
-          <a:lstStyle/>
-          <a:p>
-            <a:pPr algn="l" indent="0" marL="0">
-              <a:lnSpc>
-                <a:spcPts val="1680"/>
-              </a:lnSpc>
-              <a:spcBef>
-                <a:spcPts val="300"/>
-              </a:spcBef>
-              <a:spcAft>
-                <a:spcPts val="300"/>
-              </a:spcAft>
-              <a:buNone/>
-            </a:pPr>
-            <a:r>
-              <a:rPr lang="en-US" sz="1200" dirty="0">
-                <a:solidFill>
-                  <a:srgbClr val="1C2833"/>
-                </a:solidFill>
-                <a:latin typeface="Arial" pitchFamily="34" charset="0"/>
-                <a:ea typeface="Arial" pitchFamily="34" charset="-122"/>
-                <a:cs typeface="Arial" pitchFamily="34" charset="-120"/>
-              </a:rPr>
-              <a:t>– One row → 17 + 24 + 1 + 8 + 15 = 65 ✓    – One column → 17 + 23 + 4 + 10 + 11 = 65 ✓    – The main diagonal → 17 + 5 + 13 + 21 + 9 = 65 ✓    – The anti-diagonal → 15 + 14 + 13 + 12 + 11 = 65 ✓</a:t>
-            </a:r>
-            <a:endParaRPr lang="en-US" sz="1200" dirty="0"/>
-          </a:p>
-        </p:txBody>
-      </p:sp>
-      <p:sp>
-        <p:nvSpPr>
-          <p:cNvPr id="20" name="Text 18"/>
-          <p:cNvSpPr/>
-          <p:nvPr/>
-        </p:nvSpPr>
-        <p:spPr>
-          <a:xfrm>
-            <a:off x="634901" y="4871889"/>
-            <a:ext cx="8102798" cy="281880"/>
-          </a:xfrm>
-          <a:prstGeom prst="rect">
-            <a:avLst/>
-          </a:prstGeom>
-          <a:noFill/>
-          <a:ln/>
-        </p:spPr>
-        <p:txBody>
-          <a:bodyPr wrap="square" lIns="0" tIns="0" rIns="0" bIns="0" rtlCol="0" anchor="t"/>
-          <a:lstStyle/>
           <a:p>
             <a:pPr algn="l" marL="342900" indent="-342900">
               <a:lnSpc>
@@ -5260,15 +6430,15 @@
               <a:buChar char="•"/>
             </a:pPr>
             <a:r>
-              <a:rPr lang="en-US" sz="1200" b="1" dirty="0">
-                <a:solidFill>
-                  <a:srgbClr val="1C2833"/>
-                </a:solidFill>
-                <a:latin typeface="Arial" pitchFamily="34" charset="0"/>
-                <a:ea typeface="Arial" pitchFamily="34" charset="-122"/>
-                <a:cs typeface="Arial" pitchFamily="34" charset="-120"/>
-              </a:rPr>
-              <a:t>Notice the structure.</a:t>
+              <a:rPr lang="en-US" sz="1200" dirty="0">
+                <a:solidFill>
+                  <a:srgbClr val="1C2833"/>
+                </a:solidFill>
+                <a:latin typeface="Arial" pitchFamily="34" charset="0"/>
+                <a:ea typeface="Arial" pitchFamily="34" charset="-122"/>
+                <a:cs typeface="Arial" pitchFamily="34" charset="-120"/>
+              </a:rPr>
+              <a:t>Pre-class question: did everyone produce the </a:t>
             </a:r>
             <a:pPr algn="l" indent="0" marL="0">
               <a:lnSpc>
@@ -5280,6 +6450,26 @@
               <a:buNone/>
             </a:pPr>
             <a:r>
+              <a:rPr lang="en-US" sz="1200" i="1" dirty="0">
+                <a:solidFill>
+                  <a:srgbClr val="1C2833"/>
+                </a:solidFill>
+                <a:latin typeface="Arial" pitchFamily="34" charset="0"/>
+                <a:ea typeface="Arial" pitchFamily="34" charset="-122"/>
+                <a:cs typeface="Arial" pitchFamily="34" charset="-120"/>
+              </a:rPr>
+              <a:t>same</a:t>
+            </a:r>
+            <a:pPr algn="l" indent="0" marL="0">
+              <a:lnSpc>
+                <a:spcPts val="1620"/>
+              </a:lnSpc>
+              <a:spcAft>
+                <a:spcPts val="300"/>
+              </a:spcAft>
+              <a:buNone/>
+            </a:pPr>
+            <a:r>
               <a:rPr lang="en-US" sz="1200" dirty="0">
                 <a:solidFill>
                   <a:srgbClr val="1C2833"/>
@@ -5288,7 +6478,7 @@
                 <a:ea typeface="Arial" pitchFamily="34" charset="-122"/>
                 <a:cs typeface="Arial" pitchFamily="34" charset="-120"/>
               </a:rPr>
-              <a:t> Take 3 minutes to observe:</a:t>
+              <a:t> 5×5 last night? Most will say yes.</a:t>
             </a:r>
             <a:endParaRPr lang="en-US" sz="1200" dirty="0"/>
           </a:p>
@@ -5296,107 +6486,13 @@
       </p:sp>
       <p:sp>
         <p:nvSpPr>
-          <p:cNvPr id="21" name="Text 19"/>
-          <p:cNvSpPr/>
-          <p:nvPr/>
-        </p:nvSpPr>
-        <p:spPr>
-          <a:xfrm>
-            <a:off x="406301" y="5242620"/>
-            <a:ext cx="8498026" cy="639812"/>
-          </a:xfrm>
-          <a:prstGeom prst="rect">
-            <a:avLst/>
-          </a:prstGeom>
-          <a:noFill/>
-          <a:ln/>
-        </p:spPr>
-        <p:txBody>
-          <a:bodyPr wrap="square" lIns="0" tIns="0" rIns="0" bIns="0" rtlCol="0" anchor="t"/>
-          <a:lstStyle/>
-          <a:p>
-            <a:pPr algn="l" indent="0" marL="0">
-              <a:lnSpc>
-                <a:spcPts val="1680"/>
-              </a:lnSpc>
-              <a:spcBef>
-                <a:spcPts val="300"/>
-              </a:spcBef>
-              <a:spcAft>
-                <a:spcPts val="300"/>
-              </a:spcAft>
-              <a:buNone/>
-            </a:pPr>
-            <a:r>
-              <a:rPr lang="en-US" sz="1200" dirty="0">
-                <a:solidFill>
-                  <a:srgbClr val="1C2833"/>
-                </a:solidFill>
-                <a:latin typeface="Arial" pitchFamily="34" charset="0"/>
-                <a:ea typeface="Arial" pitchFamily="34" charset="-122"/>
-                <a:cs typeface="Arial" pitchFamily="34" charset="-120"/>
-              </a:rPr>
-              <a:t>– 13 (the middle number) is in the centre — consistent with the </a:t>
-            </a:r>
-            <a:pPr algn="l" indent="0" marL="0">
-              <a:lnSpc>
-                <a:spcPts val="1680"/>
-              </a:lnSpc>
-              <a:spcBef>
-                <a:spcPts val="300"/>
-              </a:spcBef>
-              <a:spcAft>
-                <a:spcPts val="300"/>
-              </a:spcAft>
-              <a:buNone/>
-            </a:pPr>
-            <a:r>
-              <a:rPr lang="en-US" sz="1200" i="1" dirty="0">
-                <a:solidFill>
-                  <a:srgbClr val="1C2833"/>
-                </a:solidFill>
-                <a:latin typeface="Arial" pitchFamily="34" charset="0"/>
-                <a:ea typeface="Arial" pitchFamily="34" charset="-122"/>
-                <a:cs typeface="Arial" pitchFamily="34" charset="-120"/>
-              </a:rPr>
-              <a:t>n</a:t>
-            </a:r>
-            <a:pPr algn="l" indent="0" marL="0">
-              <a:lnSpc>
-                <a:spcPts val="1680"/>
-              </a:lnSpc>
-              <a:spcBef>
-                <a:spcPts val="300"/>
-              </a:spcBef>
-              <a:spcAft>
-                <a:spcPts val="300"/>
-              </a:spcAft>
-              <a:buNone/>
-            </a:pPr>
-            <a:r>
-              <a:rPr lang="en-US" sz="1200" dirty="0">
-                <a:solidFill>
-                  <a:srgbClr val="1C2833"/>
-                </a:solidFill>
-                <a:latin typeface="Arial" pitchFamily="34" charset="0"/>
-                <a:ea typeface="Arial" pitchFamily="34" charset="-122"/>
-                <a:cs typeface="Arial" pitchFamily="34" charset="-120"/>
-              </a:rPr>
-              <a:t>²/2 + 1 = 13 rule for odd-order. – Numbers 1–9 occupy a "broken diagonal" pattern; 16–25 occupy the complementary pattern. – The same algorithm that gave us the 3×3 gave us this. The rule does not change with size.</a:t>
-            </a:r>
-            <a:endParaRPr lang="en-US" sz="1200" dirty="0"/>
-          </a:p>
-        </p:txBody>
-      </p:sp>
-      <p:sp>
-        <p:nvSpPr>
-          <p:cNvPr id="22" name="Text 20"/>
-          <p:cNvSpPr/>
-          <p:nvPr/>
-        </p:nvSpPr>
-        <p:spPr>
-          <a:xfrm>
-            <a:off x="406301" y="6034832"/>
+          <p:cNvPr id="5" name="Text 3"/>
+          <p:cNvSpPr/>
+          <p:nvPr/>
+        </p:nvSpPr>
+        <p:spPr>
+          <a:xfrm>
+            <a:off x="406301" y="4434929"/>
             <a:ext cx="8498026" cy="213271"/>
           </a:xfrm>
           <a:prstGeom prst="rect">
@@ -5540,7 +6636,7 @@
                 <a:ea typeface="Georgia" pitchFamily="34" charset="-122"/>
                 <a:cs typeface="Georgia" pitchFamily="34" charset="-120"/>
               </a:rPr>
-              <a:t>Activity (15 min) — Formative quiz Part B + speed construction</a:t>
+              <a:t>Core (20 min)</a:t>
             </a:r>
             <a:endParaRPr lang="en-US" sz="1800" dirty="0"/>
           </a:p>
@@ -5555,7 +6651,7 @@
         <p:spPr>
           <a:xfrm>
             <a:off x="634901" y="883593"/>
-            <a:ext cx="8102798" cy="750391"/>
+            <a:ext cx="8102798" cy="281880"/>
           </a:xfrm>
           <a:prstGeom prst="rect">
             <a:avLst/>
@@ -5586,7 +6682,7 @@
                 <a:ea typeface="Arial" pitchFamily="34" charset="-122"/>
                 <a:cs typeface="Arial" pitchFamily="34" charset="-120"/>
               </a:rPr>
-              <a:t>First 10 min:</a:t>
+              <a:t>Build a 5×5 together on the board.</a:t>
             </a:r>
             <a:pPr algn="l" indent="0" marL="0">
               <a:lnSpc>
@@ -5606,12 +6702,40 @@
                 <a:ea typeface="Arial" pitchFamily="34" charset="-122"/>
                 <a:cs typeface="Arial" pitchFamily="34" charset="-120"/>
               </a:rPr>
-              <a:t> Hand out </a:t>
-            </a:r>
-            <a:pPr algn="l" indent="0" marL="0">
-              <a:lnSpc>
-                <a:spcPts val="1620"/>
-              </a:lnSpc>
+              <a:t> Narrate every step. Take 8–10 minutes — go cell-by-cell.</a:t>
+            </a:r>
+            <a:endParaRPr lang="en-US" sz="1200" dirty="0"/>
+          </a:p>
+        </p:txBody>
+      </p:sp>
+      <p:sp>
+        <p:nvSpPr>
+          <p:cNvPr id="5" name="Text 3"/>
+          <p:cNvSpPr/>
+          <p:nvPr/>
+        </p:nvSpPr>
+        <p:spPr>
+          <a:xfrm>
+            <a:off x="406301" y="1254323"/>
+            <a:ext cx="8498026" cy="426541"/>
+          </a:xfrm>
+          <a:prstGeom prst="rect">
+            <a:avLst/>
+          </a:prstGeom>
+          <a:noFill/>
+          <a:ln/>
+        </p:spPr>
+        <p:txBody>
+          <a:bodyPr wrap="square" lIns="0" tIns="0" rIns="0" bIns="0" rtlCol="0" anchor="t"/>
+          <a:lstStyle/>
+          <a:p>
+            <a:pPr algn="l" indent="0" marL="0">
+              <a:lnSpc>
+                <a:spcPts val="1680"/>
+              </a:lnSpc>
+              <a:spcBef>
+                <a:spcPts val="300"/>
+              </a:spcBef>
               <a:spcAft>
                 <a:spcPts val="300"/>
               </a:spcAft>
@@ -5626,12 +6750,40 @@
                 <a:ea typeface="Arial" pitchFamily="34" charset="-122"/>
                 <a:cs typeface="Arial" pitchFamily="34" charset="-120"/>
               </a:rPr>
-              <a:t>quizzes/formative.md</a:t>
-            </a:r>
-            <a:pPr algn="l" indent="0" marL="0">
-              <a:lnSpc>
-                <a:spcPts val="1620"/>
-              </a:lnSpc>
+              <a:t>Start with 1 in row-1, column-3 (the top middle). Place 2 up-right (off the top → wraps to bottom row, column 4). Place 3 up-right from 2 (off the right → wraps to row 4, column 5)... continue.</a:t>
+            </a:r>
+            <a:endParaRPr lang="en-US" sz="1200" dirty="0"/>
+          </a:p>
+        </p:txBody>
+      </p:sp>
+      <p:sp>
+        <p:nvSpPr>
+          <p:cNvPr id="6" name="Text 4"/>
+          <p:cNvSpPr/>
+          <p:nvPr/>
+        </p:nvSpPr>
+        <p:spPr>
+          <a:xfrm>
+            <a:off x="406301" y="1757065"/>
+            <a:ext cx="8498026" cy="213271"/>
+          </a:xfrm>
+          <a:prstGeom prst="rect">
+            <a:avLst/>
+          </a:prstGeom>
+          <a:noFill/>
+          <a:ln/>
+        </p:spPr>
+        <p:txBody>
+          <a:bodyPr wrap="square" lIns="0" tIns="0" rIns="0" bIns="0" rtlCol="0" anchor="t"/>
+          <a:lstStyle/>
+          <a:p>
+            <a:pPr algn="l" indent="0" marL="0">
+              <a:lnSpc>
+                <a:spcPts val="1680"/>
+              </a:lnSpc>
+              <a:spcBef>
+                <a:spcPts val="300"/>
+              </a:spcBef>
               <a:spcAft>
                 <a:spcPts val="300"/>
               </a:spcAft>
@@ -5646,59 +6798,15 @@
                 <a:ea typeface="Arial" pitchFamily="34" charset="-122"/>
                 <a:cs typeface="Arial" pitchFamily="34" charset="-120"/>
               </a:rPr>
-              <a:t> Part B. Students complete individually.</a:t>
+              <a:t>Expected result (the classical Nārāyaṇa 5×5):</a:t>
             </a:r>
             <a:endParaRPr lang="en-US" sz="1200" dirty="0"/>
           </a:p>
-          <a:p>
-            <a:pPr algn="l" marL="342900" indent="-342900">
-              <a:lnSpc>
-                <a:spcPts val="1620"/>
-              </a:lnSpc>
-              <a:spcAft>
-                <a:spcPts val="300"/>
-              </a:spcAft>
-              <a:buSzPct val="100000"/>
-              <a:buChar char="•"/>
-            </a:pPr>
-            <a:r>
-              <a:rPr lang="en-US" sz="1200" b="1" dirty="0">
-                <a:solidFill>
-                  <a:srgbClr val="1C2833"/>
-                </a:solidFill>
-                <a:latin typeface="Arial" pitchFamily="34" charset="0"/>
-                <a:ea typeface="Arial" pitchFamily="34" charset="-122"/>
-                <a:cs typeface="Arial" pitchFamily="34" charset="-120"/>
-              </a:rPr>
-              <a:t>Last 5 min:</a:t>
-            </a:r>
-            <a:pPr algn="l" indent="0" marL="0">
-              <a:lnSpc>
-                <a:spcPts val="1620"/>
-              </a:lnSpc>
-              <a:spcAft>
-                <a:spcPts val="300"/>
-              </a:spcAft>
-              <a:buNone/>
-            </a:pPr>
-            <a:r>
-              <a:rPr lang="en-US" sz="1200" dirty="0">
-                <a:solidFill>
-                  <a:srgbClr val="1C2833"/>
-                </a:solidFill>
-                <a:latin typeface="Arial" pitchFamily="34" charset="0"/>
-                <a:ea typeface="Arial" pitchFamily="34" charset="-122"/>
-                <a:cs typeface="Arial" pitchFamily="34" charset="-120"/>
-              </a:rPr>
-              <a:t> Each student starts a fresh 5×5 grid. On "Go," they construct a magic square from scratch as fast as they can. Self-time. Verify one row before stopping the watch.</a:t>
-            </a:r>
-            <a:endParaRPr lang="en-US" sz="1200" dirty="0"/>
-          </a:p>
-        </p:txBody>
-      </p:sp>
-      <p:sp>
-        <p:nvSpPr>
-          <p:cNvPr id="5" name="Text 3"/>
+        </p:txBody>
+      </p:sp>
+      <p:sp>
+        <p:nvSpPr>
+          <p:cNvPr id="7" name="Text 5"/>
           <p:cNvSpPr/>
           <p:nvPr/>
         </p:nvSpPr>
@@ -5848,7 +6956,7 @@
                 <a:ea typeface="Georgia" pitchFamily="34" charset="-122"/>
                 <a:cs typeface="Georgia" pitchFamily="34" charset="-120"/>
               </a:rPr>
-              <a:t>Wrap-up (5 min)</a:t>
+              <a:t>Core (20 min) (cont.)</a:t>
             </a:r>
             <a:endParaRPr lang="en-US" sz="1800" dirty="0"/>
           </a:p>
@@ -5862,13 +6970,66 @@
         </p:nvSpPr>
         <p:spPr>
           <a:xfrm>
-            <a:off x="406301" y="870942"/>
-            <a:ext cx="8498026" cy="213271"/>
-          </a:xfrm>
-          <a:prstGeom prst="rect">
+            <a:off x="406301" y="883593"/>
+            <a:ext cx="8331398" cy="1825079"/>
+          </a:xfrm>
+          <a:prstGeom prst="rect">
+            <a:avLst/>
+          </a:prstGeom>
+          <a:solidFill>
+            <a:srgbClr val="F4F8F9"/>
+          </a:solidFill>
+          <a:ln/>
+        </p:spPr>
+        <p:txBody>
+          <a:bodyPr wrap="square" rtlCol="0" anchor="ctr"/>
+          <a:lstStyle/>
+          <a:p>
+            <a:pPr indent="0" marL="0">
+              <a:buNone/>
+            </a:pPr>
+            <a:endParaRPr lang="en-US" dirty="0"/>
+          </a:p>
+        </p:txBody>
+      </p:sp>
+      <p:sp>
+        <p:nvSpPr>
+          <p:cNvPr id="5" name="Shape 3"/>
+          <p:cNvSpPr/>
+          <p:nvPr/>
+        </p:nvSpPr>
+        <p:spPr>
+          <a:xfrm>
+            <a:off x="430113" y="883593"/>
+            <a:ext cx="0" cy="1825079"/>
+          </a:xfrm>
+          <a:prstGeom prst="line">
             <a:avLst/>
           </a:prstGeom>
           <a:noFill/>
+          <a:ln w="47625">
+            <a:solidFill>
+              <a:srgbClr val="277884"/>
+            </a:solidFill>
+            <a:prstDash val="solid"/>
+          </a:ln>
+        </p:spPr>
+      </p:sp>
+      <p:sp>
+        <p:nvSpPr>
+          <p:cNvPr id="6" name="Text 4"/>
+          <p:cNvSpPr/>
+          <p:nvPr/>
+        </p:nvSpPr>
+        <p:spPr>
+          <a:xfrm>
+            <a:off x="631627" y="1010543"/>
+            <a:ext cx="8086939" cy="174575"/>
+          </a:xfrm>
+          <a:prstGeom prst="rect">
+            <a:avLst/>
+          </a:prstGeom>
+          <a:noFill/>
           <a:ln/>
         </p:spPr>
         <p:txBody>
@@ -5877,41 +7038,35 @@
           <a:p>
             <a:pPr algn="l" indent="0" marL="0">
               <a:lnSpc>
-                <a:spcPts val="1680"/>
-              </a:lnSpc>
-              <a:spcBef>
-                <a:spcPts val="300"/>
-              </a:spcBef>
-              <a:spcAft>
-                <a:spcPts val="300"/>
-              </a:spcAft>
-              <a:buNone/>
-            </a:pPr>
-            <a:r>
-              <a:rPr lang="en-US" sz="1200" dirty="0">
-                <a:solidFill>
-                  <a:srgbClr val="1C2833"/>
-                </a:solidFill>
-                <a:latin typeface="Arial" pitchFamily="34" charset="0"/>
-                <a:ea typeface="Arial" pitchFamily="34" charset="-122"/>
-                <a:cs typeface="Arial" pitchFamily="34" charset="-120"/>
-              </a:rPr>
-              <a:t>– Show of hands: who finished in under 4 minutes? Under 6? Under 8?</a:t>
-            </a:r>
-            <a:endParaRPr lang="en-US" sz="1200" dirty="0"/>
-          </a:p>
-        </p:txBody>
-      </p:sp>
-      <p:sp>
-        <p:nvSpPr>
-          <p:cNvPr id="5" name="Text 3"/>
-          <p:cNvSpPr/>
-          <p:nvPr/>
-        </p:nvSpPr>
-        <p:spPr>
-          <a:xfrm>
-            <a:off x="634901" y="1173063"/>
-            <a:ext cx="8102798" cy="281880"/>
+                <a:spcPts val="1375"/>
+              </a:lnSpc>
+              <a:buNone/>
+            </a:pPr>
+            <a:r>
+              <a:rPr lang="en-US" sz="1100" dirty="0">
+                <a:solidFill>
+                  <a:srgbClr val="1C2833"/>
+                </a:solidFill>
+                <a:latin typeface="Courier New" pitchFamily="34" charset="0"/>
+                <a:ea typeface="Courier New" pitchFamily="34" charset="-122"/>
+                <a:cs typeface="Courier New" pitchFamily="34" charset="-120"/>
+              </a:rPr>
+              <a:t>17 | 24 |  1 |  8 | 15</a:t>
+            </a:r>
+            <a:endParaRPr lang="en-US" sz="1100" dirty="0"/>
+          </a:p>
+        </p:txBody>
+      </p:sp>
+      <p:sp>
+        <p:nvSpPr>
+          <p:cNvPr id="7" name="Text 5"/>
+          <p:cNvSpPr/>
+          <p:nvPr/>
+        </p:nvSpPr>
+        <p:spPr>
+          <a:xfrm>
+            <a:off x="631627" y="1185118"/>
+            <a:ext cx="8086939" cy="174575"/>
           </a:xfrm>
           <a:prstGeom prst="rect">
             <a:avLst/>
@@ -5923,41 +7078,37 @@
           <a:bodyPr wrap="square" lIns="0" tIns="0" rIns="0" bIns="0" rtlCol="0" anchor="t"/>
           <a:lstStyle/>
           <a:p>
-            <a:pPr algn="l" marL="342900" indent="-342900">
-              <a:lnSpc>
-                <a:spcPts val="1620"/>
-              </a:lnSpc>
-              <a:spcAft>
-                <a:spcPts val="300"/>
-              </a:spcAft>
-              <a:buSzPct val="100000"/>
-              <a:buChar char="•"/>
-            </a:pPr>
-            <a:r>
-              <a:rPr lang="en-US" sz="1200" i="1" dirty="0">
-                <a:solidFill>
-                  <a:srgbClr val="1C2833"/>
-                </a:solidFill>
-                <a:latin typeface="Arial" pitchFamily="34" charset="0"/>
-                <a:ea typeface="Arial" pitchFamily="34" charset="-122"/>
-                <a:cs typeface="Arial" pitchFamily="34" charset="-120"/>
-              </a:rPr>
-              <a:t>"Yesterday's home practice was the same 5×5. Tomorrow we look at a different beast — the 4×4."</a:t>
-            </a:r>
-            <a:endParaRPr lang="en-US" sz="1200" dirty="0"/>
-          </a:p>
-        </p:txBody>
-      </p:sp>
-      <p:sp>
-        <p:nvSpPr>
-          <p:cNvPr id="6" name="Text 4"/>
-          <p:cNvSpPr/>
-          <p:nvPr/>
-        </p:nvSpPr>
-        <p:spPr>
-          <a:xfrm>
-            <a:off x="406301" y="1543794"/>
-            <a:ext cx="8498026" cy="213271"/>
+            <a:pPr algn="l" indent="0" marL="0">
+              <a:lnSpc>
+                <a:spcPts val="1375"/>
+              </a:lnSpc>
+              <a:buNone/>
+            </a:pPr>
+            <a:r>
+              <a:rPr lang="en-US" sz="1100" dirty="0">
+                <a:solidFill>
+                  <a:srgbClr val="1C2833"/>
+                </a:solidFill>
+                <a:latin typeface="Courier New" pitchFamily="34" charset="0"/>
+                <a:ea typeface="Courier New" pitchFamily="34" charset="-122"/>
+                <a:cs typeface="Courier New" pitchFamily="34" charset="-120"/>
+              </a:rPr>
+              <a:t>----------------------</a:t>
+            </a:r>
+            <a:endParaRPr lang="en-US" sz="1100" dirty="0"/>
+          </a:p>
+        </p:txBody>
+      </p:sp>
+      <p:sp>
+        <p:nvSpPr>
+          <p:cNvPr id="8" name="Text 6"/>
+          <p:cNvSpPr/>
+          <p:nvPr/>
+        </p:nvSpPr>
+        <p:spPr>
+          <a:xfrm>
+            <a:off x="631627" y="1359694"/>
+            <a:ext cx="8086939" cy="174575"/>
           </a:xfrm>
           <a:prstGeom prst="rect">
             <a:avLst/>
@@ -5971,34 +7122,280 @@
           <a:p>
             <a:pPr algn="l" indent="0" marL="0">
               <a:lnSpc>
-                <a:spcPts val="1680"/>
-              </a:lnSpc>
-              <a:spcBef>
-                <a:spcPts val="300"/>
-              </a:spcBef>
-              <a:spcAft>
-                <a:spcPts val="300"/>
-              </a:spcAft>
-              <a:buNone/>
-            </a:pPr>
-            <a:r>
-              <a:rPr lang="en-US" sz="1200" dirty="0">
-                <a:solidFill>
-                  <a:srgbClr val="1C2833"/>
-                </a:solidFill>
-                <a:latin typeface="Arial" pitchFamily="34" charset="0"/>
-                <a:ea typeface="Arial" pitchFamily="34" charset="-122"/>
-                <a:cs typeface="Arial" pitchFamily="34" charset="-120"/>
-              </a:rPr>
-              <a:t>– Preview Day 6: Khajuraho and the 4×4.</a:t>
-            </a:r>
-            <a:endParaRPr lang="en-US" sz="1200" dirty="0"/>
-          </a:p>
-        </p:txBody>
-      </p:sp>
-      <p:sp>
-        <p:nvSpPr>
-          <p:cNvPr id="7" name="Text 5"/>
+                <a:spcPts val="1375"/>
+              </a:lnSpc>
+              <a:buNone/>
+            </a:pPr>
+            <a:r>
+              <a:rPr lang="en-US" sz="1100" dirty="0">
+                <a:solidFill>
+                  <a:srgbClr val="1C2833"/>
+                </a:solidFill>
+                <a:latin typeface="Courier New" pitchFamily="34" charset="0"/>
+                <a:ea typeface="Courier New" pitchFamily="34" charset="-122"/>
+                <a:cs typeface="Courier New" pitchFamily="34" charset="-120"/>
+              </a:rPr>
+              <a:t>23 |  5 |  7 | 14 | 16</a:t>
+            </a:r>
+            <a:endParaRPr lang="en-US" sz="1100" dirty="0"/>
+          </a:p>
+        </p:txBody>
+      </p:sp>
+      <p:sp>
+        <p:nvSpPr>
+          <p:cNvPr id="9" name="Text 7"/>
+          <p:cNvSpPr/>
+          <p:nvPr/>
+        </p:nvSpPr>
+        <p:spPr>
+          <a:xfrm>
+            <a:off x="631627" y="1534269"/>
+            <a:ext cx="8086939" cy="174575"/>
+          </a:xfrm>
+          <a:prstGeom prst="rect">
+            <a:avLst/>
+          </a:prstGeom>
+          <a:noFill/>
+          <a:ln/>
+        </p:spPr>
+        <p:txBody>
+          <a:bodyPr wrap="square" lIns="0" tIns="0" rIns="0" bIns="0" rtlCol="0" anchor="t"/>
+          <a:lstStyle/>
+          <a:p>
+            <a:pPr algn="l" indent="0" marL="0">
+              <a:lnSpc>
+                <a:spcPts val="1375"/>
+              </a:lnSpc>
+              <a:buNone/>
+            </a:pPr>
+            <a:r>
+              <a:rPr lang="en-US" sz="1100" dirty="0">
+                <a:solidFill>
+                  <a:srgbClr val="1C2833"/>
+                </a:solidFill>
+                <a:latin typeface="Courier New" pitchFamily="34" charset="0"/>
+                <a:ea typeface="Courier New" pitchFamily="34" charset="-122"/>
+                <a:cs typeface="Courier New" pitchFamily="34" charset="-120"/>
+              </a:rPr>
+              <a:t>----------------------</a:t>
+            </a:r>
+            <a:endParaRPr lang="en-US" sz="1100" dirty="0"/>
+          </a:p>
+        </p:txBody>
+      </p:sp>
+      <p:sp>
+        <p:nvSpPr>
+          <p:cNvPr id="10" name="Text 8"/>
+          <p:cNvSpPr/>
+          <p:nvPr/>
+        </p:nvSpPr>
+        <p:spPr>
+          <a:xfrm>
+            <a:off x="631627" y="1708845"/>
+            <a:ext cx="8086939" cy="174575"/>
+          </a:xfrm>
+          <a:prstGeom prst="rect">
+            <a:avLst/>
+          </a:prstGeom>
+          <a:noFill/>
+          <a:ln/>
+        </p:spPr>
+        <p:txBody>
+          <a:bodyPr wrap="square" lIns="0" tIns="0" rIns="0" bIns="0" rtlCol="0" anchor="t"/>
+          <a:lstStyle/>
+          <a:p>
+            <a:pPr algn="l" indent="0" marL="0">
+              <a:lnSpc>
+                <a:spcPts val="1375"/>
+              </a:lnSpc>
+              <a:buNone/>
+            </a:pPr>
+            <a:r>
+              <a:rPr lang="en-US" sz="1100" dirty="0">
+                <a:solidFill>
+                  <a:srgbClr val="1C2833"/>
+                </a:solidFill>
+                <a:latin typeface="Courier New" pitchFamily="34" charset="0"/>
+                <a:ea typeface="Courier New" pitchFamily="34" charset="-122"/>
+                <a:cs typeface="Courier New" pitchFamily="34" charset="-120"/>
+              </a:rPr>
+              <a:t>4 |  6 | 13 | 20 | 22</a:t>
+            </a:r>
+            <a:endParaRPr lang="en-US" sz="1100" dirty="0"/>
+          </a:p>
+        </p:txBody>
+      </p:sp>
+      <p:sp>
+        <p:nvSpPr>
+          <p:cNvPr id="11" name="Text 9"/>
+          <p:cNvSpPr/>
+          <p:nvPr/>
+        </p:nvSpPr>
+        <p:spPr>
+          <a:xfrm>
+            <a:off x="631627" y="1883420"/>
+            <a:ext cx="8086939" cy="174575"/>
+          </a:xfrm>
+          <a:prstGeom prst="rect">
+            <a:avLst/>
+          </a:prstGeom>
+          <a:noFill/>
+          <a:ln/>
+        </p:spPr>
+        <p:txBody>
+          <a:bodyPr wrap="square" lIns="0" tIns="0" rIns="0" bIns="0" rtlCol="0" anchor="t"/>
+          <a:lstStyle/>
+          <a:p>
+            <a:pPr algn="l" indent="0" marL="0">
+              <a:lnSpc>
+                <a:spcPts val="1375"/>
+              </a:lnSpc>
+              <a:buNone/>
+            </a:pPr>
+            <a:r>
+              <a:rPr lang="en-US" sz="1100" dirty="0">
+                <a:solidFill>
+                  <a:srgbClr val="1C2833"/>
+                </a:solidFill>
+                <a:latin typeface="Courier New" pitchFamily="34" charset="0"/>
+                <a:ea typeface="Courier New" pitchFamily="34" charset="-122"/>
+                <a:cs typeface="Courier New" pitchFamily="34" charset="-120"/>
+              </a:rPr>
+              <a:t>----------------------</a:t>
+            </a:r>
+            <a:endParaRPr lang="en-US" sz="1100" dirty="0"/>
+          </a:p>
+        </p:txBody>
+      </p:sp>
+      <p:sp>
+        <p:nvSpPr>
+          <p:cNvPr id="12" name="Text 10"/>
+          <p:cNvSpPr/>
+          <p:nvPr/>
+        </p:nvSpPr>
+        <p:spPr>
+          <a:xfrm>
+            <a:off x="631627" y="2057995"/>
+            <a:ext cx="8086939" cy="174575"/>
+          </a:xfrm>
+          <a:prstGeom prst="rect">
+            <a:avLst/>
+          </a:prstGeom>
+          <a:noFill/>
+          <a:ln/>
+        </p:spPr>
+        <p:txBody>
+          <a:bodyPr wrap="square" lIns="0" tIns="0" rIns="0" bIns="0" rtlCol="0" anchor="t"/>
+          <a:lstStyle/>
+          <a:p>
+            <a:pPr algn="l" indent="0" marL="0">
+              <a:lnSpc>
+                <a:spcPts val="1375"/>
+              </a:lnSpc>
+              <a:buNone/>
+            </a:pPr>
+            <a:r>
+              <a:rPr lang="en-US" sz="1100" dirty="0">
+                <a:solidFill>
+                  <a:srgbClr val="1C2833"/>
+                </a:solidFill>
+                <a:latin typeface="Courier New" pitchFamily="34" charset="0"/>
+                <a:ea typeface="Courier New" pitchFamily="34" charset="-122"/>
+                <a:cs typeface="Courier New" pitchFamily="34" charset="-120"/>
+              </a:rPr>
+              <a:t>10 | 12 | 19 | 21 |  3</a:t>
+            </a:r>
+            <a:endParaRPr lang="en-US" sz="1100" dirty="0"/>
+          </a:p>
+        </p:txBody>
+      </p:sp>
+      <p:sp>
+        <p:nvSpPr>
+          <p:cNvPr id="13" name="Text 11"/>
+          <p:cNvSpPr/>
+          <p:nvPr/>
+        </p:nvSpPr>
+        <p:spPr>
+          <a:xfrm>
+            <a:off x="631627" y="2232571"/>
+            <a:ext cx="8086939" cy="174575"/>
+          </a:xfrm>
+          <a:prstGeom prst="rect">
+            <a:avLst/>
+          </a:prstGeom>
+          <a:noFill/>
+          <a:ln/>
+        </p:spPr>
+        <p:txBody>
+          <a:bodyPr wrap="square" lIns="0" tIns="0" rIns="0" bIns="0" rtlCol="0" anchor="t"/>
+          <a:lstStyle/>
+          <a:p>
+            <a:pPr algn="l" indent="0" marL="0">
+              <a:lnSpc>
+                <a:spcPts val="1375"/>
+              </a:lnSpc>
+              <a:buNone/>
+            </a:pPr>
+            <a:r>
+              <a:rPr lang="en-US" sz="1100" dirty="0">
+                <a:solidFill>
+                  <a:srgbClr val="1C2833"/>
+                </a:solidFill>
+                <a:latin typeface="Courier New" pitchFamily="34" charset="0"/>
+                <a:ea typeface="Courier New" pitchFamily="34" charset="-122"/>
+                <a:cs typeface="Courier New" pitchFamily="34" charset="-120"/>
+              </a:rPr>
+              <a:t>----------------------</a:t>
+            </a:r>
+            <a:endParaRPr lang="en-US" sz="1100" dirty="0"/>
+          </a:p>
+        </p:txBody>
+      </p:sp>
+      <p:sp>
+        <p:nvSpPr>
+          <p:cNvPr id="14" name="Text 12"/>
+          <p:cNvSpPr/>
+          <p:nvPr/>
+        </p:nvSpPr>
+        <p:spPr>
+          <a:xfrm>
+            <a:off x="631627" y="2407146"/>
+            <a:ext cx="8086939" cy="174575"/>
+          </a:xfrm>
+          <a:prstGeom prst="rect">
+            <a:avLst/>
+          </a:prstGeom>
+          <a:noFill/>
+          <a:ln/>
+        </p:spPr>
+        <p:txBody>
+          <a:bodyPr wrap="square" lIns="0" tIns="0" rIns="0" bIns="0" rtlCol="0" anchor="t"/>
+          <a:lstStyle/>
+          <a:p>
+            <a:pPr algn="l" indent="0" marL="0">
+              <a:lnSpc>
+                <a:spcPts val="1375"/>
+              </a:lnSpc>
+              <a:buNone/>
+            </a:pPr>
+            <a:r>
+              <a:rPr lang="en-US" sz="1100" dirty="0">
+                <a:solidFill>
+                  <a:srgbClr val="1C2833"/>
+                </a:solidFill>
+                <a:latin typeface="Courier New" pitchFamily="34" charset="0"/>
+                <a:ea typeface="Courier New" pitchFamily="34" charset="-122"/>
+                <a:cs typeface="Courier New" pitchFamily="34" charset="-120"/>
+              </a:rPr>
+              <a:t>11 | 18 | 25 |  2 |  9</a:t>
+            </a:r>
+            <a:endParaRPr lang="en-US" sz="1100" dirty="0"/>
+          </a:p>
+        </p:txBody>
+      </p:sp>
+      <p:sp>
+        <p:nvSpPr>
+          <p:cNvPr id="15" name="Text 13"/>
           <p:cNvSpPr/>
           <p:nvPr/>
         </p:nvSpPr>
@@ -6148,7 +7545,7 @@
                 <a:ea typeface="Georgia" pitchFamily="34" charset="-122"/>
                 <a:cs typeface="Georgia" pitchFamily="34" charset="-120"/>
               </a:rPr>
-              <a:t>Student-facing content</a:t>
+              <a:t>Core (20 min) (cont.)</a:t>
             </a:r>
             <a:endParaRPr lang="en-US" sz="1800" dirty="0"/>
           </a:p>
@@ -6162,476 +7559,185 @@
         </p:nvSpPr>
         <p:spPr>
           <a:xfrm>
-            <a:off x="406301" y="883593"/>
-            <a:ext cx="8331398" cy="2169319"/>
-          </a:xfrm>
-          <a:prstGeom prst="rect">
-            <a:avLst/>
-          </a:prstGeom>
-          <a:solidFill>
-            <a:srgbClr val="F4F8F9"/>
-          </a:solidFill>
-          <a:ln/>
-        </p:spPr>
-        <p:txBody>
-          <a:bodyPr wrap="square" rtlCol="0" anchor="ctr"/>
-          <a:lstStyle/>
-          <a:p>
-            <a:pPr indent="0" marL="0">
-              <a:buNone/>
-            </a:pPr>
-            <a:endParaRPr lang="en-US" dirty="0"/>
-          </a:p>
-        </p:txBody>
-      </p:sp>
-      <p:sp>
-        <p:nvSpPr>
-          <p:cNvPr id="5" name="Shape 3"/>
-          <p:cNvSpPr/>
-          <p:nvPr/>
-        </p:nvSpPr>
-        <p:spPr>
-          <a:xfrm>
-            <a:off x="434876" y="883593"/>
-            <a:ext cx="0" cy="2169319"/>
-          </a:xfrm>
-          <a:prstGeom prst="line">
+            <a:off x="634901" y="883593"/>
+            <a:ext cx="8102798" cy="281880"/>
+          </a:xfrm>
+          <a:prstGeom prst="rect">
             <a:avLst/>
           </a:prstGeom>
           <a:noFill/>
-          <a:ln w="57150">
-            <a:solidFill>
-              <a:srgbClr val="FE4447"/>
-            </a:solidFill>
-            <a:prstDash val="solid"/>
-          </a:ln>
-        </p:spPr>
+          <a:ln/>
+        </p:spPr>
+        <p:txBody>
+          <a:bodyPr wrap="square" lIns="0" tIns="0" rIns="0" bIns="0" rtlCol="0" anchor="t"/>
+          <a:lstStyle/>
+          <a:p>
+            <a:pPr algn="l" marL="342900" indent="-342900">
+              <a:lnSpc>
+                <a:spcPts val="1620"/>
+              </a:lnSpc>
+              <a:spcAft>
+                <a:spcPts val="300"/>
+              </a:spcAft>
+              <a:buSzPct val="100000"/>
+              <a:buChar char="•"/>
+            </a:pPr>
+            <a:r>
+              <a:rPr lang="en-US" sz="1200" b="1" dirty="0">
+                <a:solidFill>
+                  <a:srgbClr val="1C2833"/>
+                </a:solidFill>
+                <a:latin typeface="Arial" pitchFamily="34" charset="0"/>
+                <a:ea typeface="Arial" pitchFamily="34" charset="-122"/>
+                <a:cs typeface="Arial" pitchFamily="34" charset="-120"/>
+              </a:rPr>
+              <a:t>Verify together.</a:t>
+            </a:r>
+            <a:pPr algn="l" indent="0" marL="0">
+              <a:lnSpc>
+                <a:spcPts val="1620"/>
+              </a:lnSpc>
+              <a:spcAft>
+                <a:spcPts val="300"/>
+              </a:spcAft>
+              <a:buNone/>
+            </a:pPr>
+            <a:r>
+              <a:rPr lang="en-US" sz="1200" dirty="0">
+                <a:solidFill>
+                  <a:srgbClr val="1C2833"/>
+                </a:solidFill>
+                <a:latin typeface="Arial" pitchFamily="34" charset="0"/>
+                <a:ea typeface="Arial" pitchFamily="34" charset="-122"/>
+                <a:cs typeface="Arial" pitchFamily="34" charset="-120"/>
+              </a:rPr>
+              <a:t> Pick:</a:t>
+            </a:r>
+            <a:endParaRPr lang="en-US" sz="1200" dirty="0"/>
+          </a:p>
+        </p:txBody>
+      </p:sp>
+      <p:sp>
+        <p:nvSpPr>
+          <p:cNvPr id="5" name="Text 3"/>
+          <p:cNvSpPr/>
+          <p:nvPr/>
+        </p:nvSpPr>
+        <p:spPr>
+          <a:xfrm>
+            <a:off x="634901" y="1266974"/>
+            <a:ext cx="8102798" cy="1013222"/>
+          </a:xfrm>
+          <a:prstGeom prst="rect">
+            <a:avLst/>
+          </a:prstGeom>
+          <a:noFill/>
+          <a:ln/>
+        </p:spPr>
+        <p:txBody>
+          <a:bodyPr wrap="square" lIns="0" tIns="0" rIns="0" bIns="0" rtlCol="0" anchor="t"/>
+          <a:lstStyle/>
+          <a:p>
+            <a:pPr algn="l" marL="342900" indent="-342900">
+              <a:lnSpc>
+                <a:spcPts val="1620"/>
+              </a:lnSpc>
+              <a:spcAft>
+                <a:spcPts val="300"/>
+              </a:spcAft>
+              <a:buSzPct val="100000"/>
+              <a:buChar char="•"/>
+            </a:pPr>
+            <a:r>
+              <a:rPr lang="en-US" sz="1200" dirty="0">
+                <a:solidFill>
+                  <a:srgbClr val="1C2833"/>
+                </a:solidFill>
+                <a:latin typeface="Arial" pitchFamily="34" charset="0"/>
+                <a:ea typeface="Arial" pitchFamily="34" charset="-122"/>
+                <a:cs typeface="Arial" pitchFamily="34" charset="-120"/>
+              </a:rPr>
+              <a:t>One row → 17 + 24 + 1 + 8 + 15 = 65 ✓</a:t>
+            </a:r>
+            <a:endParaRPr lang="en-US" sz="1200" dirty="0"/>
+          </a:p>
+          <a:p>
+            <a:pPr algn="l" marL="342900" indent="-342900">
+              <a:lnSpc>
+                <a:spcPts val="1620"/>
+              </a:lnSpc>
+              <a:spcAft>
+                <a:spcPts val="300"/>
+              </a:spcAft>
+              <a:buSzPct val="100000"/>
+              <a:buChar char="•"/>
+            </a:pPr>
+            <a:r>
+              <a:rPr lang="en-US" sz="1200" dirty="0">
+                <a:solidFill>
+                  <a:srgbClr val="1C2833"/>
+                </a:solidFill>
+                <a:latin typeface="Arial" pitchFamily="34" charset="0"/>
+                <a:ea typeface="Arial" pitchFamily="34" charset="-122"/>
+                <a:cs typeface="Arial" pitchFamily="34" charset="-120"/>
+              </a:rPr>
+              <a:t>One column → 17 + 23 + 4 + 10 + 11 = 65 ✓</a:t>
+            </a:r>
+            <a:endParaRPr lang="en-US" sz="1200" dirty="0"/>
+          </a:p>
+          <a:p>
+            <a:pPr algn="l" marL="342900" indent="-342900">
+              <a:lnSpc>
+                <a:spcPts val="1620"/>
+              </a:lnSpc>
+              <a:spcAft>
+                <a:spcPts val="300"/>
+              </a:spcAft>
+              <a:buSzPct val="100000"/>
+              <a:buChar char="•"/>
+            </a:pPr>
+            <a:r>
+              <a:rPr lang="en-US" sz="1200" dirty="0">
+                <a:solidFill>
+                  <a:srgbClr val="1C2833"/>
+                </a:solidFill>
+                <a:latin typeface="Arial" pitchFamily="34" charset="0"/>
+                <a:ea typeface="Arial" pitchFamily="34" charset="-122"/>
+                <a:cs typeface="Arial" pitchFamily="34" charset="-120"/>
+              </a:rPr>
+              <a:t>The main diagonal → 17 + 5 + 13 + 21 + 9 = 65 ✓</a:t>
+            </a:r>
+            <a:endParaRPr lang="en-US" sz="1200" dirty="0"/>
+          </a:p>
+          <a:p>
+            <a:pPr algn="l" marL="342900" indent="-342900">
+              <a:lnSpc>
+                <a:spcPts val="1620"/>
+              </a:lnSpc>
+              <a:spcAft>
+                <a:spcPts val="300"/>
+              </a:spcAft>
+              <a:buSzPct val="100000"/>
+              <a:buChar char="•"/>
+            </a:pPr>
+            <a:r>
+              <a:rPr lang="en-US" sz="1200" dirty="0">
+                <a:solidFill>
+                  <a:srgbClr val="1C2833"/>
+                </a:solidFill>
+                <a:latin typeface="Arial" pitchFamily="34" charset="0"/>
+                <a:ea typeface="Arial" pitchFamily="34" charset="-122"/>
+                <a:cs typeface="Arial" pitchFamily="34" charset="-120"/>
+              </a:rPr>
+              <a:t>The anti-diagonal → 15 + 14 + 13 + 12 + 11 = 65 ✓</a:t>
+            </a:r>
+            <a:endParaRPr lang="en-US" sz="1200" dirty="0"/>
+          </a:p>
+        </p:txBody>
       </p:sp>
       <p:sp>
         <p:nvSpPr>
           <p:cNvPr id="6" name="Text 4"/>
-          <p:cNvSpPr/>
-          <p:nvPr/>
-        </p:nvSpPr>
-        <p:spPr>
-          <a:xfrm>
-            <a:off x="692051" y="1074093"/>
-            <a:ext cx="7973389" cy="230981"/>
-          </a:xfrm>
-          <a:prstGeom prst="rect">
-            <a:avLst/>
-          </a:prstGeom>
-          <a:noFill/>
-          <a:ln/>
-        </p:spPr>
-        <p:txBody>
-          <a:bodyPr wrap="square" lIns="0" tIns="0" rIns="0" bIns="0" rtlCol="0" anchor="t"/>
-          <a:lstStyle/>
-          <a:p>
-            <a:pPr algn="l" indent="0" marL="0">
-              <a:lnSpc>
-                <a:spcPts val="1820"/>
-              </a:lnSpc>
-              <a:spcBef>
-                <a:spcPts val="300"/>
-              </a:spcBef>
-              <a:spcAft>
-                <a:spcPts val="300"/>
-              </a:spcAft>
-              <a:buNone/>
-            </a:pPr>
-            <a:r>
-              <a:rPr lang="en-US" sz="1300" b="1" i="1" dirty="0">
-                <a:solidFill>
-                  <a:srgbClr val="1C2833"/>
-                </a:solidFill>
-                <a:latin typeface="Georgia" pitchFamily="34" charset="0"/>
-                <a:ea typeface="Georgia" pitchFamily="34" charset="-122"/>
-                <a:cs typeface="Georgia" pitchFamily="34" charset="-120"/>
-              </a:rPr>
-              <a:t>The 5×5 magic square — classical Nārāyaṇa form</a:t>
-            </a:r>
-            <a:endParaRPr lang="en-US" sz="1300" dirty="0"/>
-          </a:p>
-        </p:txBody>
-      </p:sp>
-      <p:sp>
-        <p:nvSpPr>
-          <p:cNvPr id="7" name="Text 5"/>
-          <p:cNvSpPr/>
-          <p:nvPr/>
-        </p:nvSpPr>
-        <p:spPr>
-          <a:xfrm>
-            <a:off x="692051" y="1343174"/>
-            <a:ext cx="7973389" cy="230981"/>
-          </a:xfrm>
-          <a:prstGeom prst="rect">
-            <a:avLst/>
-          </a:prstGeom>
-          <a:noFill/>
-          <a:ln/>
-        </p:spPr>
-        <p:txBody>
-          <a:bodyPr wrap="square" lIns="0" tIns="0" rIns="0" bIns="0" rtlCol="0" anchor="t"/>
-          <a:lstStyle/>
-          <a:p>
-            <a:pPr algn="l" indent="0" marL="0">
-              <a:lnSpc>
-                <a:spcPts val="1820"/>
-              </a:lnSpc>
-              <a:spcBef>
-                <a:spcPts val="300"/>
-              </a:spcBef>
-              <a:spcAft>
-                <a:spcPts val="300"/>
-              </a:spcAft>
-              <a:buNone/>
-            </a:pPr>
-            <a:r>
-              <a:rPr lang="en-US" sz="1300" dirty="0">
-                <a:solidFill>
-                  <a:srgbClr val="1C2833"/>
-                </a:solidFill>
-                <a:latin typeface="Georgia" pitchFamily="34" charset="0"/>
-                <a:ea typeface="Georgia" pitchFamily="34" charset="-122"/>
-                <a:cs typeface="Georgia" pitchFamily="34" charset="-120"/>
-              </a:rPr>
-              <a:t>Magic constant: 65 (from </a:t>
-            </a:r>
-            <a:pPr algn="l" indent="0" marL="0">
-              <a:lnSpc>
-                <a:spcPts val="1820"/>
-              </a:lnSpc>
-              <a:spcBef>
-                <a:spcPts val="300"/>
-              </a:spcBef>
-              <a:spcAft>
-                <a:spcPts val="300"/>
-              </a:spcAft>
-              <a:buNone/>
-            </a:pPr>
-            <a:r>
-              <a:rPr lang="en-US" sz="1300" i="1" dirty="0">
-                <a:solidFill>
-                  <a:srgbClr val="1C2833"/>
-                </a:solidFill>
-                <a:latin typeface="Georgia" pitchFamily="34" charset="0"/>
-                <a:ea typeface="Georgia" pitchFamily="34" charset="-122"/>
-                <a:cs typeface="Georgia" pitchFamily="34" charset="-120"/>
-              </a:rPr>
-              <a:t>S = n(n² + 1)/2</a:t>
-            </a:r>
-            <a:pPr algn="l" indent="0" marL="0">
-              <a:lnSpc>
-                <a:spcPts val="1820"/>
-              </a:lnSpc>
-              <a:spcBef>
-                <a:spcPts val="300"/>
-              </a:spcBef>
-              <a:spcAft>
-                <a:spcPts val="300"/>
-              </a:spcAft>
-              <a:buNone/>
-            </a:pPr>
-            <a:r>
-              <a:rPr lang="en-US" sz="1300" dirty="0">
-                <a:solidFill>
-                  <a:srgbClr val="1C2833"/>
-                </a:solidFill>
-                <a:latin typeface="Georgia" pitchFamily="34" charset="0"/>
-                <a:ea typeface="Georgia" pitchFamily="34" charset="-122"/>
-                <a:cs typeface="Georgia" pitchFamily="34" charset="-120"/>
-              </a:rPr>
-              <a:t> with </a:t>
-            </a:r>
-            <a:pPr algn="l" indent="0" marL="0">
-              <a:lnSpc>
-                <a:spcPts val="1820"/>
-              </a:lnSpc>
-              <a:spcBef>
-                <a:spcPts val="300"/>
-              </a:spcBef>
-              <a:spcAft>
-                <a:spcPts val="300"/>
-              </a:spcAft>
-              <a:buNone/>
-            </a:pPr>
-            <a:r>
-              <a:rPr lang="en-US" sz="1300" i="1" dirty="0">
-                <a:solidFill>
-                  <a:srgbClr val="1C2833"/>
-                </a:solidFill>
-                <a:latin typeface="Georgia" pitchFamily="34" charset="0"/>
-                <a:ea typeface="Georgia" pitchFamily="34" charset="-122"/>
-                <a:cs typeface="Georgia" pitchFamily="34" charset="-120"/>
-              </a:rPr>
-              <a:t>n</a:t>
-            </a:r>
-            <a:pPr algn="l" indent="0" marL="0">
-              <a:lnSpc>
-                <a:spcPts val="1820"/>
-              </a:lnSpc>
-              <a:spcBef>
-                <a:spcPts val="300"/>
-              </a:spcBef>
-              <a:spcAft>
-                <a:spcPts val="300"/>
-              </a:spcAft>
-              <a:buNone/>
-            </a:pPr>
-            <a:r>
-              <a:rPr lang="en-US" sz="1300" dirty="0">
-                <a:solidFill>
-                  <a:srgbClr val="1C2833"/>
-                </a:solidFill>
-                <a:latin typeface="Georgia" pitchFamily="34" charset="0"/>
-                <a:ea typeface="Georgia" pitchFamily="34" charset="-122"/>
-                <a:cs typeface="Georgia" pitchFamily="34" charset="-120"/>
-              </a:rPr>
-              <a:t> = 5).</a:t>
-            </a:r>
-            <a:endParaRPr lang="en-US" sz="1300" dirty="0"/>
-          </a:p>
-        </p:txBody>
-      </p:sp>
-      <p:sp>
-        <p:nvSpPr>
-          <p:cNvPr id="8" name="Text 6"/>
-          <p:cNvSpPr/>
-          <p:nvPr/>
-        </p:nvSpPr>
-        <p:spPr>
-          <a:xfrm>
-            <a:off x="692051" y="1612255"/>
-            <a:ext cx="7973389" cy="750094"/>
-          </a:xfrm>
-          <a:prstGeom prst="rect">
-            <a:avLst/>
-          </a:prstGeom>
-          <a:noFill/>
-          <a:ln/>
-        </p:spPr>
-        <p:txBody>
-          <a:bodyPr wrap="square" lIns="0" tIns="0" rIns="0" bIns="0" rtlCol="0" anchor="t"/>
-          <a:lstStyle/>
-          <a:p>
-            <a:pPr algn="l" indent="0" marL="0">
-              <a:lnSpc>
-                <a:spcPts val="1820"/>
-              </a:lnSpc>
-              <a:spcBef>
-                <a:spcPts val="300"/>
-              </a:spcBef>
-              <a:spcAft>
-                <a:spcPts val="300"/>
-              </a:spcAft>
-              <a:buNone/>
-            </a:pPr>
-            <a:r>
-              <a:rPr lang="en-US" sz="1300" dirty="0">
-                <a:solidFill>
-                  <a:srgbClr val="1C2833"/>
-                </a:solidFill>
-                <a:latin typeface="Georgia" pitchFamily="34" charset="0"/>
-                <a:ea typeface="Georgia" pitchFamily="34" charset="-122"/>
-                <a:cs typeface="Georgia" pitchFamily="34" charset="-120"/>
-              </a:rPr>
-              <a:t>``</a:t>
-            </a:r>
-            <a:pPr algn="l" indent="0" marL="0">
-              <a:lnSpc>
-                <a:spcPts val="1820"/>
-              </a:lnSpc>
-              <a:spcBef>
-                <a:spcPts val="300"/>
-              </a:spcBef>
-              <a:spcAft>
-                <a:spcPts val="300"/>
-              </a:spcAft>
-              <a:buNone/>
-            </a:pPr>
-            <a:r>
-              <a:rPr lang="en-US" sz="1300" i="1" dirty="0">
-                <a:solidFill>
-                  <a:srgbClr val="1C2833"/>
-                </a:solidFill>
-                <a:latin typeface="Georgia" pitchFamily="34" charset="0"/>
-                <a:ea typeface="Georgia" pitchFamily="34" charset="-122"/>
-                <a:cs typeface="Georgia" pitchFamily="34" charset="-120"/>
-              </a:rPr>
-              <a:t> 17 | 24 | 1 | 8 | 15 ---------------------- 23 | 5 | 7 | 14 | 16 ---------------------- 4 | 6 | 13 | 20 | 22 ---------------------- 10 | 12 | 19 | 21 | 3 ---------------------- 11 | 18 | 25 | 2 | 9</a:t>
-            </a:r>
-            <a:pPr algn="l" indent="0" marL="0">
-              <a:lnSpc>
-                <a:spcPts val="1820"/>
-              </a:lnSpc>
-              <a:spcBef>
-                <a:spcPts val="300"/>
-              </a:spcBef>
-              <a:spcAft>
-                <a:spcPts val="300"/>
-              </a:spcAft>
-              <a:buNone/>
-            </a:pPr>
-            <a:r>
-              <a:rPr lang="en-US" sz="1300" dirty="0">
-                <a:solidFill>
-                  <a:srgbClr val="1C2833"/>
-                </a:solidFill>
-                <a:latin typeface="Georgia" pitchFamily="34" charset="0"/>
-                <a:ea typeface="Georgia" pitchFamily="34" charset="-122"/>
-                <a:cs typeface="Georgia" pitchFamily="34" charset="-120"/>
-              </a:rPr>
-              <a:t>``</a:t>
-            </a:r>
-            <a:endParaRPr lang="en-US" sz="1300" dirty="0"/>
-          </a:p>
-        </p:txBody>
-      </p:sp>
-      <p:sp>
-        <p:nvSpPr>
-          <p:cNvPr id="9" name="Text 7"/>
-          <p:cNvSpPr/>
-          <p:nvPr/>
-        </p:nvSpPr>
-        <p:spPr>
-          <a:xfrm>
-            <a:off x="692051" y="2400449"/>
-            <a:ext cx="7973389" cy="461963"/>
-          </a:xfrm>
-          <a:prstGeom prst="rect">
-            <a:avLst/>
-          </a:prstGeom>
-          <a:noFill/>
-          <a:ln/>
-        </p:spPr>
-        <p:txBody>
-          <a:bodyPr wrap="square" lIns="0" tIns="0" rIns="0" bIns="0" rtlCol="0" anchor="t"/>
-          <a:lstStyle/>
-          <a:p>
-            <a:pPr algn="l" indent="0" marL="0">
-              <a:lnSpc>
-                <a:spcPts val="1820"/>
-              </a:lnSpc>
-              <a:spcBef>
-                <a:spcPts val="300"/>
-              </a:spcBef>
-              <a:spcAft>
-                <a:spcPts val="300"/>
-              </a:spcAft>
-              <a:buNone/>
-            </a:pPr>
-            <a:r>
-              <a:rPr lang="en-US" sz="1300" dirty="0">
-                <a:solidFill>
-                  <a:srgbClr val="1C2833"/>
-                </a:solidFill>
-                <a:latin typeface="Georgia" pitchFamily="34" charset="0"/>
-                <a:ea typeface="Georgia" pitchFamily="34" charset="-122"/>
-                <a:cs typeface="Georgia" pitchFamily="34" charset="-120"/>
-              </a:rPr>
-              <a:t>Built using the </a:t>
-            </a:r>
-            <a:pPr algn="l" indent="0" marL="0">
-              <a:lnSpc>
-                <a:spcPts val="1820"/>
-              </a:lnSpc>
-              <a:spcBef>
-                <a:spcPts val="300"/>
-              </a:spcBef>
-              <a:spcAft>
-                <a:spcPts val="300"/>
-              </a:spcAft>
-              <a:buNone/>
-            </a:pPr>
-            <a:r>
-              <a:rPr lang="en-US" sz="1300" i="1" dirty="0">
-                <a:solidFill>
-                  <a:srgbClr val="1C2833"/>
-                </a:solidFill>
-                <a:latin typeface="Georgia" pitchFamily="34" charset="0"/>
-                <a:ea typeface="Georgia" pitchFamily="34" charset="-122"/>
-                <a:cs typeface="Georgia" pitchFamily="34" charset="-120"/>
-              </a:rPr>
-              <a:t>turagagati</a:t>
-            </a:r>
-            <a:pPr algn="l" indent="0" marL="0">
-              <a:lnSpc>
-                <a:spcPts val="1820"/>
-              </a:lnSpc>
-              <a:spcBef>
-                <a:spcPts val="300"/>
-              </a:spcBef>
-              <a:spcAft>
-                <a:spcPts val="300"/>
-              </a:spcAft>
-              <a:buNone/>
-            </a:pPr>
-            <a:r>
-              <a:rPr lang="en-US" sz="1300" dirty="0">
-                <a:solidFill>
-                  <a:srgbClr val="1C2833"/>
-                </a:solidFill>
-                <a:latin typeface="Georgia" pitchFamily="34" charset="0"/>
-                <a:ea typeface="Georgia" pitchFamily="34" charset="-122"/>
-                <a:cs typeface="Georgia" pitchFamily="34" charset="-120"/>
-              </a:rPr>
-              <a:t> method, exactly as for the 3×3 — the rule does not change with size, as long as </a:t>
-            </a:r>
-            <a:pPr algn="l" indent="0" marL="0">
-              <a:lnSpc>
-                <a:spcPts val="1820"/>
-              </a:lnSpc>
-              <a:spcBef>
-                <a:spcPts val="300"/>
-              </a:spcBef>
-              <a:spcAft>
-                <a:spcPts val="300"/>
-              </a:spcAft>
-              <a:buNone/>
-            </a:pPr>
-            <a:r>
-              <a:rPr lang="en-US" sz="1300" i="1" dirty="0">
-                <a:solidFill>
-                  <a:srgbClr val="1C2833"/>
-                </a:solidFill>
-                <a:latin typeface="Georgia" pitchFamily="34" charset="0"/>
-                <a:ea typeface="Georgia" pitchFamily="34" charset="-122"/>
-                <a:cs typeface="Georgia" pitchFamily="34" charset="-120"/>
-              </a:rPr>
-              <a:t>n</a:t>
-            </a:r>
-            <a:pPr algn="l" indent="0" marL="0">
-              <a:lnSpc>
-                <a:spcPts val="1820"/>
-              </a:lnSpc>
-              <a:spcBef>
-                <a:spcPts val="300"/>
-              </a:spcBef>
-              <a:spcAft>
-                <a:spcPts val="300"/>
-              </a:spcAft>
-              <a:buNone/>
-            </a:pPr>
-            <a:r>
-              <a:rPr lang="en-US" sz="1300" dirty="0">
-                <a:solidFill>
-                  <a:srgbClr val="1C2833"/>
-                </a:solidFill>
-                <a:latin typeface="Georgia" pitchFamily="34" charset="0"/>
-                <a:ea typeface="Georgia" pitchFamily="34" charset="-122"/>
-                <a:cs typeface="Georgia" pitchFamily="34" charset="-120"/>
-              </a:rPr>
-              <a:t> is odd.</a:t>
-            </a:r>
-            <a:endParaRPr lang="en-US" sz="1300" dirty="0"/>
-          </a:p>
-        </p:txBody>
-      </p:sp>
-      <p:sp>
-        <p:nvSpPr>
-          <p:cNvPr id="10" name="Text 8"/>
           <p:cNvSpPr/>
           <p:nvPr/>
         </p:nvSpPr>
